--- a/slides/docker-session6-github-actions-advanced.pptx
+++ b/slides/docker-session6-github-actions-advanced.pptx
@@ -2,44 +2,41 @@
 <file path=ppt/presentation.xml><?xml version="1.0" encoding="utf-8"?>
 <p:presentation xmlns:p="http://schemas.openxmlformats.org/presentationml/2006/main">
   <p:sldMasterIdLst>
-    <p:sldMasterId xmlns:r="http://schemas.openxmlformats.org/officeDocument/2006/relationships" id="2147483648" r:id="Rda2e950bd4524544"/>
+    <p:sldMasterId xmlns:r="http://schemas.openxmlformats.org/officeDocument/2006/relationships" id="2147483648" r:id="R8304d2a6921f482f"/>
   </p:sldMasterIdLst>
-  <p:notesMasterIdLst>
-    <p:notesMasterId xmlns:r="http://schemas.openxmlformats.org/officeDocument/2006/relationships" r:id="Rd0f402de114442e3"/>
-  </p:notesMasterIdLst>
   <p:sldIdLst>
-    <p:sldId xmlns:r="http://schemas.openxmlformats.org/officeDocument/2006/relationships" id="256" r:id="R9e11f43acb91407f"/>
-    <p:sldId xmlns:r="http://schemas.openxmlformats.org/officeDocument/2006/relationships" id="257" r:id="Rb508d7662a1041fe"/>
-    <p:sldId xmlns:r="http://schemas.openxmlformats.org/officeDocument/2006/relationships" id="258" r:id="R52d1456600df4df7"/>
-    <p:sldId xmlns:r="http://schemas.openxmlformats.org/officeDocument/2006/relationships" id="259" r:id="R5dbb8192eb834295"/>
-    <p:sldId xmlns:r="http://schemas.openxmlformats.org/officeDocument/2006/relationships" id="260" r:id="R073447f226574955"/>
-    <p:sldId xmlns:r="http://schemas.openxmlformats.org/officeDocument/2006/relationships" id="261" r:id="Rd2fcd35341094044"/>
-    <p:sldId xmlns:r="http://schemas.openxmlformats.org/officeDocument/2006/relationships" id="262" r:id="R3f10e64af15c4c9e"/>
-    <p:sldId xmlns:r="http://schemas.openxmlformats.org/officeDocument/2006/relationships" id="263" r:id="Rce6e18ff63d54057"/>
-    <p:sldId xmlns:r="http://schemas.openxmlformats.org/officeDocument/2006/relationships" id="264" r:id="R1f0e9a1298b6422d"/>
-    <p:sldId xmlns:r="http://schemas.openxmlformats.org/officeDocument/2006/relationships" id="265" r:id="R25372ef475a74a37"/>
-    <p:sldId xmlns:r="http://schemas.openxmlformats.org/officeDocument/2006/relationships" id="266" r:id="R46cf6c4b988b4bd3"/>
-    <p:sldId xmlns:r="http://schemas.openxmlformats.org/officeDocument/2006/relationships" id="267" r:id="Rc17e9e3ee5884a31"/>
-    <p:sldId xmlns:r="http://schemas.openxmlformats.org/officeDocument/2006/relationships" id="268" r:id="R1b134a693f3044aa"/>
-    <p:sldId xmlns:r="http://schemas.openxmlformats.org/officeDocument/2006/relationships" id="269" r:id="R55beb2efe69d467b"/>
-    <p:sldId xmlns:r="http://schemas.openxmlformats.org/officeDocument/2006/relationships" id="270" r:id="Rf775797f618d4895"/>
-    <p:sldId xmlns:r="http://schemas.openxmlformats.org/officeDocument/2006/relationships" id="271" r:id="R07e9a93b45444d87"/>
-    <p:sldId xmlns:r="http://schemas.openxmlformats.org/officeDocument/2006/relationships" id="272" r:id="R4ff2399b06f24bde"/>
-    <p:sldId xmlns:r="http://schemas.openxmlformats.org/officeDocument/2006/relationships" id="273" r:id="Red134b7a8cae48ca"/>
-    <p:sldId xmlns:r="http://schemas.openxmlformats.org/officeDocument/2006/relationships" id="274" r:id="R07cea49c335b4303"/>
-    <p:sldId xmlns:r="http://schemas.openxmlformats.org/officeDocument/2006/relationships" id="275" r:id="Rea8ec39114494220"/>
-    <p:sldId xmlns:r="http://schemas.openxmlformats.org/officeDocument/2006/relationships" id="276" r:id="R2ec54c87cb5b462c"/>
-    <p:sldId xmlns:r="http://schemas.openxmlformats.org/officeDocument/2006/relationships" id="277" r:id="Rbe110a0b01ef4662"/>
-    <p:sldId xmlns:r="http://schemas.openxmlformats.org/officeDocument/2006/relationships" id="278" r:id="Rd5ee53b7bb344307"/>
-    <p:sldId xmlns:r="http://schemas.openxmlformats.org/officeDocument/2006/relationships" id="279" r:id="R9748669bf3554bd9"/>
-    <p:sldId xmlns:r="http://schemas.openxmlformats.org/officeDocument/2006/relationships" id="280" r:id="R5cc19638c9e346e0"/>
-    <p:sldId xmlns:r="http://schemas.openxmlformats.org/officeDocument/2006/relationships" id="281" r:id="Rd4bc9f395d08431f"/>
-    <p:sldId xmlns:r="http://schemas.openxmlformats.org/officeDocument/2006/relationships" id="282" r:id="Recbb2bf22d7c4564"/>
-    <p:sldId xmlns:r="http://schemas.openxmlformats.org/officeDocument/2006/relationships" id="283" r:id="R2822449a475e4ced"/>
-    <p:sldId xmlns:r="http://schemas.openxmlformats.org/officeDocument/2006/relationships" id="284" r:id="R626f739f549f41a7"/>
-    <p:sldId xmlns:r="http://schemas.openxmlformats.org/officeDocument/2006/relationships" id="285" r:id="R24a46d2f9d1044f7"/>
-    <p:sldId xmlns:r="http://schemas.openxmlformats.org/officeDocument/2006/relationships" id="286" r:id="Rfd24832896d04acf"/>
-    <p:sldId xmlns:r="http://schemas.openxmlformats.org/officeDocument/2006/relationships" id="287" r:id="R65f50970cc004eb1"/>
+    <p:sldId xmlns:r="http://schemas.openxmlformats.org/officeDocument/2006/relationships" id="256" r:id="R62a2b1414cb046db"/>
+    <p:sldId xmlns:r="http://schemas.openxmlformats.org/officeDocument/2006/relationships" id="257" r:id="Rf6a06d840e474aa3"/>
+    <p:sldId xmlns:r="http://schemas.openxmlformats.org/officeDocument/2006/relationships" id="258" r:id="Rf04a048a15264ee2"/>
+    <p:sldId xmlns:r="http://schemas.openxmlformats.org/officeDocument/2006/relationships" id="259" r:id="R72bd6c42d6904cb4"/>
+    <p:sldId xmlns:r="http://schemas.openxmlformats.org/officeDocument/2006/relationships" id="260" r:id="Rd430e35556c64a63"/>
+    <p:sldId xmlns:r="http://schemas.openxmlformats.org/officeDocument/2006/relationships" id="261" r:id="Rb20b6b2ff0ba4dc6"/>
+    <p:sldId xmlns:r="http://schemas.openxmlformats.org/officeDocument/2006/relationships" id="262" r:id="R684ebd8f34764fdf"/>
+    <p:sldId xmlns:r="http://schemas.openxmlformats.org/officeDocument/2006/relationships" id="263" r:id="Rddb89301bcc74712"/>
+    <p:sldId xmlns:r="http://schemas.openxmlformats.org/officeDocument/2006/relationships" id="264" r:id="R8c54cd6d5f724feb"/>
+    <p:sldId xmlns:r="http://schemas.openxmlformats.org/officeDocument/2006/relationships" id="265" r:id="Rb3ed9b5598184ffc"/>
+    <p:sldId xmlns:r="http://schemas.openxmlformats.org/officeDocument/2006/relationships" id="266" r:id="Ra51a10bc77ab404c"/>
+    <p:sldId xmlns:r="http://schemas.openxmlformats.org/officeDocument/2006/relationships" id="267" r:id="R468e0323ab0942fc"/>
+    <p:sldId xmlns:r="http://schemas.openxmlformats.org/officeDocument/2006/relationships" id="268" r:id="Rb14e302e7f754d84"/>
+    <p:sldId xmlns:r="http://schemas.openxmlformats.org/officeDocument/2006/relationships" id="269" r:id="R7afc985f43f74955"/>
+    <p:sldId xmlns:r="http://schemas.openxmlformats.org/officeDocument/2006/relationships" id="270" r:id="R7404e312f8ec41b8"/>
+    <p:sldId xmlns:r="http://schemas.openxmlformats.org/officeDocument/2006/relationships" id="271" r:id="R28dadf8848394e46"/>
+    <p:sldId xmlns:r="http://schemas.openxmlformats.org/officeDocument/2006/relationships" id="272" r:id="Rd3d6a3b9b9454a94"/>
+    <p:sldId xmlns:r="http://schemas.openxmlformats.org/officeDocument/2006/relationships" id="273" r:id="Rc1337ecc54004527"/>
+    <p:sldId xmlns:r="http://schemas.openxmlformats.org/officeDocument/2006/relationships" id="274" r:id="Rd96911d4550b40b9"/>
+    <p:sldId xmlns:r="http://schemas.openxmlformats.org/officeDocument/2006/relationships" id="275" r:id="R6d2e4b684cf84cfe"/>
+    <p:sldId xmlns:r="http://schemas.openxmlformats.org/officeDocument/2006/relationships" id="276" r:id="R7553d00b43024b68"/>
+    <p:sldId xmlns:r="http://schemas.openxmlformats.org/officeDocument/2006/relationships" id="277" r:id="Rb1d046fce68b4d17"/>
+    <p:sldId xmlns:r="http://schemas.openxmlformats.org/officeDocument/2006/relationships" id="278" r:id="Rc178dc25bf8442c4"/>
+    <p:sldId xmlns:r="http://schemas.openxmlformats.org/officeDocument/2006/relationships" id="279" r:id="R21e462a42d3e4227"/>
+    <p:sldId xmlns:r="http://schemas.openxmlformats.org/officeDocument/2006/relationships" id="280" r:id="R56890f74ead24288"/>
+    <p:sldId xmlns:r="http://schemas.openxmlformats.org/officeDocument/2006/relationships" id="281" r:id="R18eb01c9591a4cee"/>
+    <p:sldId xmlns:r="http://schemas.openxmlformats.org/officeDocument/2006/relationships" id="282" r:id="R256ffc4dba7a418a"/>
+    <p:sldId xmlns:r="http://schemas.openxmlformats.org/officeDocument/2006/relationships" id="283" r:id="R1610ded70ee24d44"/>
+    <p:sldId xmlns:r="http://schemas.openxmlformats.org/officeDocument/2006/relationships" id="284" r:id="R19bcf70926cf4fcb"/>
+    <p:sldId xmlns:r="http://schemas.openxmlformats.org/officeDocument/2006/relationships" id="285" r:id="Rc375546b5e5a494b"/>
+    <p:sldId xmlns:r="http://schemas.openxmlformats.org/officeDocument/2006/relationships" id="286" r:id="R535e6db305bd4940"/>
+    <p:sldId xmlns:r="http://schemas.openxmlformats.org/officeDocument/2006/relationships" id="287" r:id="R03185644caab4dc3"/>
   </p:sldIdLst>
   <p:sldSz cx="12192000" cy="6858000"/>
   <p:notesSz cx="6858000" cy="9144000"/>
@@ -141,2633 +138,6 @@
 </p:presentation>
 </file>
 
-<file path=ppt/notesMasters/notesMaster1.xml><?xml version="1.0" encoding="utf-8"?>
-<p:notesMaster xmlns:p="http://schemas.openxmlformats.org/presentationml/2006/main">
-  <p:cSld>
-    <p:bg>
-      <p:bgRef idx="1001">
-        <a:schemeClr xmlns:a="http://schemas.openxmlformats.org/drawingml/2006/main" val="bg1"/>
-      </p:bgRef>
-    </p:bg>
-    <p:spTree>
-      <p:nvGrpSpPr>
-        <p:cNvPr id="1" name=""/>
-        <p:cNvGrpSpPr/>
-        <p:nvPr/>
-      </p:nvGrpSpPr>
-      <p:grpSpPr>
-        <a:xfrm xmlns:a="http://schemas.openxmlformats.org/drawingml/2006/main"/>
-      </p:grpSpPr>
-      <p:sp>
-        <p:nvSpPr>
-          <p:cNvPr id="2" name="Header Placeholder"/>
-          <p:cNvSpPr/>
-          <p:nvPr>
-            <p:ph type="hdr" sz="quarter"/>
-          </p:nvPr>
-        </p:nvSpPr>
-        <p:spPr>
-          <a:prstGeom xmlns:a="http://schemas.openxmlformats.org/drawingml/2006/main" prst="rect">
-            <a:avLst/>
-          </a:prstGeom>
-        </p:spPr>
-        <p:txBody>
-          <a:bodyPr xmlns:a="http://schemas.openxmlformats.org/drawingml/2006/main"/>
-          <a:lstStyle xmlns:a="http://schemas.openxmlformats.org/drawingml/2006/main"/>
-          <a:p xmlns:a="http://schemas.openxmlformats.org/drawingml/2006/main"/>
-        </p:txBody>
-      </p:sp>
-      <p:sp>
-        <p:nvSpPr>
-          <p:cNvPr id="3" name="Date Placeholder"/>
-          <p:cNvSpPr/>
-          <p:nvPr>
-            <p:ph type="dt" sz="quarter" idx="1"/>
-          </p:nvPr>
-        </p:nvSpPr>
-        <p:spPr>
-          <a:prstGeom xmlns:a="http://schemas.openxmlformats.org/drawingml/2006/main" prst="rect">
-            <a:avLst/>
-          </a:prstGeom>
-        </p:spPr>
-        <p:txBody>
-          <a:bodyPr xmlns:a="http://schemas.openxmlformats.org/drawingml/2006/main"/>
-          <a:lstStyle xmlns:a="http://schemas.openxmlformats.org/drawingml/2006/main"/>
-          <a:p xmlns:a="http://schemas.openxmlformats.org/drawingml/2006/main"/>
-        </p:txBody>
-      </p:sp>
-      <p:sp>
-        <p:nvSpPr>
-          <p:cNvPr id="4" name="Slide Image Placeholder"/>
-          <p:cNvSpPr/>
-          <p:nvPr>
-            <p:ph type="sldImg" idx="2"/>
-          </p:nvPr>
-        </p:nvSpPr>
-        <p:spPr>
-          <a:prstGeom xmlns:a="http://schemas.openxmlformats.org/drawingml/2006/main" prst="rect">
-            <a:avLst/>
-          </a:prstGeom>
-        </p:spPr>
-        <p:txBody>
-          <a:bodyPr xmlns:a="http://schemas.openxmlformats.org/drawingml/2006/main"/>
-          <a:lstStyle xmlns:a="http://schemas.openxmlformats.org/drawingml/2006/main"/>
-          <a:p xmlns:a="http://schemas.openxmlformats.org/drawingml/2006/main"/>
-        </p:txBody>
-      </p:sp>
-      <p:sp>
-        <p:nvSpPr>
-          <p:cNvPr id="5" name="Notes Placeholder"/>
-          <p:cNvSpPr/>
-          <p:nvPr>
-            <p:ph type="body" sz="quarter" idx="3"/>
-          </p:nvPr>
-        </p:nvSpPr>
-        <p:spPr>
-          <a:prstGeom xmlns:a="http://schemas.openxmlformats.org/drawingml/2006/main" prst="rect">
-            <a:avLst/>
-          </a:prstGeom>
-        </p:spPr>
-        <p:txBody>
-          <a:bodyPr xmlns:a="http://schemas.openxmlformats.org/drawingml/2006/main"/>
-          <a:lstStyle xmlns:a="http://schemas.openxmlformats.org/drawingml/2006/main"/>
-          <a:p xmlns:a="http://schemas.openxmlformats.org/drawingml/2006/main"/>
-        </p:txBody>
-      </p:sp>
-      <p:sp>
-        <p:nvSpPr>
-          <p:cNvPr id="6" name="Footer Placeholder"/>
-          <p:cNvSpPr/>
-          <p:nvPr>
-            <p:ph type="ftr" sz="quarter" idx="4"/>
-          </p:nvPr>
-        </p:nvSpPr>
-        <p:spPr>
-          <a:prstGeom xmlns:a="http://schemas.openxmlformats.org/drawingml/2006/main" prst="rect">
-            <a:avLst/>
-          </a:prstGeom>
-        </p:spPr>
-        <p:txBody>
-          <a:bodyPr xmlns:a="http://schemas.openxmlformats.org/drawingml/2006/main"/>
-          <a:lstStyle xmlns:a="http://schemas.openxmlformats.org/drawingml/2006/main"/>
-          <a:p xmlns:a="http://schemas.openxmlformats.org/drawingml/2006/main"/>
-        </p:txBody>
-      </p:sp>
-      <p:sp>
-        <p:nvSpPr>
-          <p:cNvPr id="7" name="Slide Number Placeholder"/>
-          <p:cNvSpPr/>
-          <p:nvPr>
-            <p:ph type="sldNum" sz="quarter" idx="5"/>
-          </p:nvPr>
-        </p:nvSpPr>
-        <p:spPr>
-          <a:prstGeom xmlns:a="http://schemas.openxmlformats.org/drawingml/2006/main" prst="rect">
-            <a:avLst/>
-          </a:prstGeom>
-        </p:spPr>
-        <p:txBody>
-          <a:bodyPr xmlns:a="http://schemas.openxmlformats.org/drawingml/2006/main"/>
-          <a:lstStyle xmlns:a="http://schemas.openxmlformats.org/drawingml/2006/main"/>
-          <a:p xmlns:a="http://schemas.openxmlformats.org/drawingml/2006/main"/>
-        </p:txBody>
-      </p:sp>
-    </p:spTree>
-  </p:cSld>
-  <p:clrMap bg1="lt1" tx1="dk1" bg2="lt2" tx2="dk2" accent1="accent1" accent2="accent2" accent3="accent3" accent4="accent4" accent5="accent5" accent6="accent6" hlink="hlink" folHlink="folHlink"/>
-  <p:notesStyle>
-    <a:lvl1pPr xmlns:a="http://schemas.openxmlformats.org/drawingml/2006/main" marL="0" algn="l" defTabSz="914400" rtl="0" eaLnBrk="1" latinLnBrk="0" hangingPunct="1">
-      <a:defRPr sz="1200" kern="1200"/>
-    </a:lvl1pPr>
-  </p:notesStyle>
-</p:notesMaster>
-</file>
-
-<file path=ppt/notesMasters/theme/theme3.xml><?xml version="1.0" encoding="utf-8"?>
-<a:theme xmlns:a="http://schemas.openxmlformats.org/drawingml/2006/main" name="ChatGPT">
-  <a:themeElements>
-    <a:clrScheme name="ChatGPT">
-      <a:dk1>
-        <a:srgbClr val="000000"/>
-      </a:dk1>
-      <a:lt1>
-        <a:srgbClr val="FFFFFF"/>
-      </a:lt1>
-      <a:dk2>
-        <a:srgbClr val="0E2841"/>
-      </a:dk2>
-      <a:lt2>
-        <a:srgbClr val="E8E8E8"/>
-      </a:lt2>
-      <a:accent1>
-        <a:srgbClr val="156082"/>
-      </a:accent1>
-      <a:accent2>
-        <a:srgbClr val="E97132"/>
-      </a:accent2>
-      <a:accent3>
-        <a:srgbClr val="196B24"/>
-      </a:accent3>
-      <a:accent4>
-        <a:srgbClr val="0F9ED5"/>
-      </a:accent4>
-      <a:accent5>
-        <a:srgbClr val="A02B93"/>
-      </a:accent5>
-      <a:accent6>
-        <a:srgbClr val="4EA72E"/>
-      </a:accent6>
-      <a:hlink>
-        <a:srgbClr val="467886"/>
-      </a:hlink>
-      <a:folHlink>
-        <a:srgbClr val="96607D"/>
-      </a:folHlink>
-    </a:clrScheme>
-    <a:fontScheme name="Office">
-      <a:majorFont>
-        <a:latin typeface="Calibri Light"/>
-        <a:ea typeface="Calibri Light"/>
-        <a:cs typeface="Calibri Light"/>
-      </a:majorFont>
-      <a:minorFont>
-        <a:latin typeface="Calibri"/>
-        <a:ea typeface="Calibri"/>
-        <a:cs typeface="Calibri"/>
-      </a:minorFont>
-    </a:fontScheme>
-    <a:fmtScheme name="ChatGPT">
-      <a:fillStyleLst>
-        <a:solidFill>
-          <a:schemeClr val="phClr"/>
-        </a:solidFill>
-        <a:gradFill>
-          <a:gsLst>
-            <a:gs pos="0">
-              <a:schemeClr val="phClr">
-                <a:tint val="67000"/>
-                <a:lumMod val="110000"/>
-                <a:satMod val="105000"/>
-              </a:schemeClr>
-            </a:gs>
-            <a:gs pos="50000">
-              <a:schemeClr val="phClr">
-                <a:tint val="73000"/>
-                <a:lumMod val="105000"/>
-                <a:satMod val="103000"/>
-              </a:schemeClr>
-            </a:gs>
-            <a:gs pos="100000">
-              <a:schemeClr val="phClr">
-                <a:tint val="81000"/>
-                <a:lumMod val="105000"/>
-                <a:satMod val="109000"/>
-              </a:schemeClr>
-            </a:gs>
-          </a:gsLst>
-          <a:lin ang="5400000" scaled="0"/>
-        </a:gradFill>
-        <a:gradFill>
-          <a:gsLst>
-            <a:gs pos="0">
-              <a:schemeClr val="phClr">
-                <a:tint val="94000"/>
-                <a:lumMod val="102000"/>
-                <a:satMod val="103000"/>
-              </a:schemeClr>
-            </a:gs>
-            <a:gs pos="50000">
-              <a:schemeClr val="phClr">
-                <a:shade val="100000"/>
-                <a:lumMod val="100000"/>
-                <a:satMod val="110000"/>
-              </a:schemeClr>
-            </a:gs>
-            <a:gs pos="100000">
-              <a:schemeClr val="phClr">
-                <a:shade val="78000"/>
-                <a:lumMod val="99000"/>
-                <a:satMod val="120000"/>
-              </a:schemeClr>
-            </a:gs>
-          </a:gsLst>
-          <a:lin ang="5400000" scaled="0"/>
-        </a:gradFill>
-      </a:fillStyleLst>
-      <a:lnStyleLst>
-        <a:ln w="12700">
-          <a:solidFill>
-            <a:schemeClr val="phClr"/>
-          </a:solidFill>
-          <a:prstDash val="solid"/>
-        </a:ln>
-        <a:ln w="19050">
-          <a:solidFill>
-            <a:schemeClr val="phClr"/>
-          </a:solidFill>
-          <a:prstDash val="solid"/>
-        </a:ln>
-        <a:ln w="25400">
-          <a:solidFill>
-            <a:schemeClr val="phClr"/>
-          </a:solidFill>
-          <a:prstDash val="solid"/>
-        </a:ln>
-      </a:lnStyleLst>
-      <a:effectStyleLst>
-        <a:effectStyle>
-          <a:effectLst/>
-        </a:effectStyle>
-        <a:effectStyle>
-          <a:effectLst/>
-        </a:effectStyle>
-        <a:effectStyle>
-          <a:effectLst>
-            <a:outerShdw blurRad="57150" dist="19050" dir="5400000">
-              <a:srgbClr val="000000">
-                <a:alpha val="16000"/>
-              </a:srgbClr>
-            </a:outerShdw>
-          </a:effectLst>
-        </a:effectStyle>
-        <a:effectStyle>
-          <a:effectLst>
-            <a:outerShdw blurRad="19050" dist="9525" dir="5400000">
-              <a:srgbClr val="000000">
-                <a:alpha val="6000"/>
-              </a:srgbClr>
-            </a:outerShdw>
-          </a:effectLst>
-        </a:effectStyle>
-        <a:effectStyle>
-          <a:effectLst>
-            <a:outerShdw blurRad="28575" dist="9525" dir="5400000">
-              <a:srgbClr val="000000">
-                <a:alpha val="8000"/>
-              </a:srgbClr>
-            </a:outerShdw>
-          </a:effectLst>
-        </a:effectStyle>
-        <a:effectStyle>
-          <a:effectLst>
-            <a:outerShdw blurRad="57150" dist="19050" dir="5400000">
-              <a:srgbClr val="000000">
-                <a:alpha val="10000"/>
-              </a:srgbClr>
-            </a:outerShdw>
-          </a:effectLst>
-        </a:effectStyle>
-        <a:effectStyle>
-          <a:effectLst>
-            <a:outerShdw blurRad="114300" dist="38100" dir="5400000">
-              <a:srgbClr val="000000">
-                <a:alpha val="12000"/>
-              </a:srgbClr>
-            </a:outerShdw>
-          </a:effectLst>
-        </a:effectStyle>
-        <a:effectStyle>
-          <a:effectLst>
-            <a:outerShdw blurRad="171450" dist="57150" dir="5400000">
-              <a:srgbClr val="000000">
-                <a:alpha val="16000"/>
-              </a:srgbClr>
-            </a:outerShdw>
-          </a:effectLst>
-        </a:effectStyle>
-        <a:effectStyle>
-          <a:effectLst>
-            <a:outerShdw blurRad="266700" dist="95250" dir="5400000">
-              <a:srgbClr val="000000">
-                <a:alpha val="24000"/>
-              </a:srgbClr>
-            </a:outerShdw>
-          </a:effectLst>
-        </a:effectStyle>
-      </a:effectStyleLst>
-      <a:bgFillStyleLst>
-        <a:solidFill>
-          <a:schemeClr val="phClr"/>
-        </a:solidFill>
-        <a:solidFill>
-          <a:schemeClr val="phClr">
-            <a:tint val="95000"/>
-            <a:satMod val="170000"/>
-          </a:schemeClr>
-        </a:solidFill>
-        <a:gradFill>
-          <a:gsLst>
-            <a:gs pos="0">
-              <a:schemeClr val="phClr">
-                <a:tint val="93000"/>
-                <a:shade val="98000"/>
-                <a:lumMod val="102000"/>
-                <a:satMod val="150000"/>
-              </a:schemeClr>
-            </a:gs>
-            <a:gs pos="50000">
-              <a:schemeClr val="phClr">
-                <a:tint val="98000"/>
-                <a:shade val="90000"/>
-                <a:lumMod val="103000"/>
-                <a:satMod val="130000"/>
-              </a:schemeClr>
-            </a:gs>
-            <a:gs pos="100000">
-              <a:schemeClr val="phClr">
-                <a:shade val="63000"/>
-                <a:satMod val="120000"/>
-              </a:schemeClr>
-            </a:gs>
-          </a:gsLst>
-          <a:lin ang="5400000" scaled="0"/>
-        </a:gradFill>
-      </a:bgFillStyleLst>
-    </a:fmtScheme>
-  </a:themeElements>
-</a:theme>
-</file>
-
-<file path=ppt/notesSlides/notesSlide1.xml><?xml version="1.0" encoding="utf-8"?>
-<p:notes xmlns:p="http://schemas.openxmlformats.org/presentationml/2006/main">
-  <p:cSld>
-    <p:spTree>
-      <p:nvGrpSpPr>
-        <p:cNvPr id="1" name=""/>
-        <p:cNvGrpSpPr/>
-        <p:nvPr/>
-      </p:nvGrpSpPr>
-      <p:grpSpPr>
-        <a:xfrm xmlns:a="http://schemas.openxmlformats.org/drawingml/2006/main"/>
-      </p:grpSpPr>
-      <p:sp>
-        <p:nvSpPr>
-          <p:cNvPr id="2" name="Slide Image Placeholder 1"/>
-          <p:cNvSpPr>
-            <a:spLocks xmlns:a="http://schemas.openxmlformats.org/drawingml/2006/main" noGrp="1"/>
-          </p:cNvSpPr>
-          <p:nvPr>
-            <p:ph type="sldImg" idx="0"/>
-          </p:nvPr>
-        </p:nvSpPr>
-        <p:spPr/>
-      </p:sp>
-      <p:sp>
-        <p:nvSpPr>
-          <p:cNvPr id="3" name="Notes Placeholder 2"/>
-          <p:cNvSpPr>
-            <a:spLocks xmlns:a="http://schemas.openxmlformats.org/drawingml/2006/main" noGrp="1"/>
-          </p:cNvSpPr>
-          <p:nvPr>
-            <p:ph type="body" idx="1"/>
-          </p:nvPr>
-        </p:nvSpPr>
-        <p:spPr/>
-        <p:txBody>
-          <a:bodyPr xmlns:a="http://schemas.openxmlformats.org/drawingml/2006/main"/>
-          <a:lstStyle xmlns:a="http://schemas.openxmlformats.org/drawingml/2006/main"/>
-          <a:p xmlns:a="http://schemas.openxmlformats.org/drawingml/2006/main">
-            <a:r>
-              <a:t>第六堂是 capstone：把 GitHub Actions 進階語法與前面 Dockerfile、Docker Hub 串起來。</a:t>
-            </a:r>
-          </a:p>
-        </p:txBody>
-      </p:sp>
-      <p:sp>
-        <p:nvSpPr>
-          <p:cNvPr id="4" name="Slide Number Placeholder 3"/>
-          <p:cNvSpPr>
-            <a:spLocks xmlns:a="http://schemas.openxmlformats.org/drawingml/2006/main" noGrp="1"/>
-          </p:cNvSpPr>
-          <p:nvPr>
-            <p:ph type="sldNum" idx="5"/>
-          </p:nvPr>
-        </p:nvSpPr>
-        <p:spPr/>
-        <p:txBody>
-          <a:bodyPr xmlns:a="http://schemas.openxmlformats.org/drawingml/2006/main"/>
-          <a:lstStyle xmlns:a="http://schemas.openxmlformats.org/drawingml/2006/main"/>
-          <a:p xmlns:a="http://schemas.openxmlformats.org/drawingml/2006/main"/>
-        </p:txBody>
-      </p:sp>
-    </p:spTree>
-  </p:cSld>
-  <p:clrMapOvr>
-    <a:masterClrMapping xmlns:a="http://schemas.openxmlformats.org/drawingml/2006/main"/>
-  </p:clrMapOvr>
-</p:notes>
-</file>
-
-<file path=ppt/notesSlides/notesSlide10.xml><?xml version="1.0" encoding="utf-8"?>
-<p:notes xmlns:p="http://schemas.openxmlformats.org/presentationml/2006/main">
-  <p:cSld>
-    <p:spTree>
-      <p:nvGrpSpPr>
-        <p:cNvPr id="1" name=""/>
-        <p:cNvGrpSpPr/>
-        <p:nvPr/>
-      </p:nvGrpSpPr>
-      <p:grpSpPr>
-        <a:xfrm xmlns:a="http://schemas.openxmlformats.org/drawingml/2006/main"/>
-      </p:grpSpPr>
-      <p:sp>
-        <p:nvSpPr>
-          <p:cNvPr id="2" name="Slide Image Placeholder 1"/>
-          <p:cNvSpPr>
-            <a:spLocks xmlns:a="http://schemas.openxmlformats.org/drawingml/2006/main" noGrp="1"/>
-          </p:cNvSpPr>
-          <p:nvPr>
-            <p:ph type="sldImg" idx="0"/>
-          </p:nvPr>
-        </p:nvSpPr>
-        <p:spPr/>
-      </p:sp>
-      <p:sp>
-        <p:nvSpPr>
-          <p:cNvPr id="3" name="Notes Placeholder 2"/>
-          <p:cNvSpPr>
-            <a:spLocks xmlns:a="http://schemas.openxmlformats.org/drawingml/2006/main" noGrp="1"/>
-          </p:cNvSpPr>
-          <p:nvPr>
-            <p:ph type="body" idx="1"/>
-          </p:nvPr>
-        </p:nvSpPr>
-        <p:spPr/>
-        <p:txBody>
-          <a:bodyPr xmlns:a="http://schemas.openxmlformats.org/drawingml/2006/main"/>
-          <a:lstStyle xmlns:a="http://schemas.openxmlformats.org/drawingml/2006/main"/>
-          <a:p xmlns:a="http://schemas.openxmlformats.org/drawingml/2006/main">
-            <a:r>
-              <a:t>這頁是完整專案的目標，先不要進細節。</a:t>
-            </a:r>
-          </a:p>
-        </p:txBody>
-      </p:sp>
-      <p:sp>
-        <p:nvSpPr>
-          <p:cNvPr id="4" name="Slide Number Placeholder 3"/>
-          <p:cNvSpPr>
-            <a:spLocks xmlns:a="http://schemas.openxmlformats.org/drawingml/2006/main" noGrp="1"/>
-          </p:cNvSpPr>
-          <p:nvPr>
-            <p:ph type="sldNum" idx="5"/>
-          </p:nvPr>
-        </p:nvSpPr>
-        <p:spPr/>
-        <p:txBody>
-          <a:bodyPr xmlns:a="http://schemas.openxmlformats.org/drawingml/2006/main"/>
-          <a:lstStyle xmlns:a="http://schemas.openxmlformats.org/drawingml/2006/main"/>
-          <a:p xmlns:a="http://schemas.openxmlformats.org/drawingml/2006/main"/>
-        </p:txBody>
-      </p:sp>
-    </p:spTree>
-  </p:cSld>
-  <p:clrMapOvr>
-    <a:masterClrMapping xmlns:a="http://schemas.openxmlformats.org/drawingml/2006/main"/>
-  </p:clrMapOvr>
-</p:notes>
-</file>
-
-<file path=ppt/notesSlides/notesSlide11.xml><?xml version="1.0" encoding="utf-8"?>
-<p:notes xmlns:p="http://schemas.openxmlformats.org/presentationml/2006/main">
-  <p:cSld>
-    <p:spTree>
-      <p:nvGrpSpPr>
-        <p:cNvPr id="1" name=""/>
-        <p:cNvGrpSpPr/>
-        <p:nvPr/>
-      </p:nvGrpSpPr>
-      <p:grpSpPr>
-        <a:xfrm xmlns:a="http://schemas.openxmlformats.org/drawingml/2006/main"/>
-      </p:grpSpPr>
-      <p:sp>
-        <p:nvSpPr>
-          <p:cNvPr id="2" name="Slide Image Placeholder 1"/>
-          <p:cNvSpPr>
-            <a:spLocks xmlns:a="http://schemas.openxmlformats.org/drawingml/2006/main" noGrp="1"/>
-          </p:cNvSpPr>
-          <p:nvPr>
-            <p:ph type="sldImg" idx="0"/>
-          </p:nvPr>
-        </p:nvSpPr>
-        <p:spPr/>
-      </p:sp>
-      <p:sp>
-        <p:nvSpPr>
-          <p:cNvPr id="3" name="Notes Placeholder 2"/>
-          <p:cNvSpPr>
-            <a:spLocks xmlns:a="http://schemas.openxmlformats.org/drawingml/2006/main" noGrp="1"/>
-          </p:cNvSpPr>
-          <p:nvPr>
-            <p:ph type="body" idx="1"/>
-          </p:nvPr>
-        </p:nvSpPr>
-        <p:spPr/>
-        <p:txBody>
-          <a:bodyPr xmlns:a="http://schemas.openxmlformats.org/drawingml/2006/main"/>
-          <a:lstStyle xmlns:a="http://schemas.openxmlformats.org/drawingml/2006/main"/>
-          <a:p xmlns:a="http://schemas.openxmlformats.org/drawingml/2006/main">
-            <a:r>
-              <a:t>先讓學生知道專案檔案結構。</a:t>
-            </a:r>
-          </a:p>
-        </p:txBody>
-      </p:sp>
-      <p:sp>
-        <p:nvSpPr>
-          <p:cNvPr id="4" name="Slide Number Placeholder 3"/>
-          <p:cNvSpPr>
-            <a:spLocks xmlns:a="http://schemas.openxmlformats.org/drawingml/2006/main" noGrp="1"/>
-          </p:cNvSpPr>
-          <p:nvPr>
-            <p:ph type="sldNum" idx="5"/>
-          </p:nvPr>
-        </p:nvSpPr>
-        <p:spPr/>
-        <p:txBody>
-          <a:bodyPr xmlns:a="http://schemas.openxmlformats.org/drawingml/2006/main"/>
-          <a:lstStyle xmlns:a="http://schemas.openxmlformats.org/drawingml/2006/main"/>
-          <a:p xmlns:a="http://schemas.openxmlformats.org/drawingml/2006/main"/>
-        </p:txBody>
-      </p:sp>
-    </p:spTree>
-  </p:cSld>
-  <p:clrMapOvr>
-    <a:masterClrMapping xmlns:a="http://schemas.openxmlformats.org/drawingml/2006/main"/>
-  </p:clrMapOvr>
-</p:notes>
-</file>
-
-<file path=ppt/notesSlides/notesSlide12.xml><?xml version="1.0" encoding="utf-8"?>
-<p:notes xmlns:p="http://schemas.openxmlformats.org/presentationml/2006/main">
-  <p:cSld>
-    <p:spTree>
-      <p:nvGrpSpPr>
-        <p:cNvPr id="1" name=""/>
-        <p:cNvGrpSpPr/>
-        <p:nvPr/>
-      </p:nvGrpSpPr>
-      <p:grpSpPr>
-        <a:xfrm xmlns:a="http://schemas.openxmlformats.org/drawingml/2006/main"/>
-      </p:grpSpPr>
-      <p:sp>
-        <p:nvSpPr>
-          <p:cNvPr id="2" name="Slide Image Placeholder 1"/>
-          <p:cNvSpPr>
-            <a:spLocks xmlns:a="http://schemas.openxmlformats.org/drawingml/2006/main" noGrp="1"/>
-          </p:cNvSpPr>
-          <p:nvPr>
-            <p:ph type="sldImg" idx="0"/>
-          </p:nvPr>
-        </p:nvSpPr>
-        <p:spPr/>
-      </p:sp>
-      <p:sp>
-        <p:nvSpPr>
-          <p:cNvPr id="3" name="Notes Placeholder 2"/>
-          <p:cNvSpPr>
-            <a:spLocks xmlns:a="http://schemas.openxmlformats.org/drawingml/2006/main" noGrp="1"/>
-          </p:cNvSpPr>
-          <p:nvPr>
-            <p:ph type="body" idx="1"/>
-          </p:nvPr>
-        </p:nvSpPr>
-        <p:spPr/>
-        <p:txBody>
-          <a:bodyPr xmlns:a="http://schemas.openxmlformats.org/drawingml/2006/main"/>
-          <a:lstStyle xmlns:a="http://schemas.openxmlformats.org/drawingml/2006/main"/>
-          <a:p xmlns:a="http://schemas.openxmlformats.org/drawingml/2006/main">
-            <a:r>
-              <a:t>完整 app.py 還包含 add 和 is_positive，投影片只放 API 重要片段。</a:t>
-            </a:r>
-          </a:p>
-        </p:txBody>
-      </p:sp>
-      <p:sp>
-        <p:nvSpPr>
-          <p:cNvPr id="4" name="Slide Number Placeholder 3"/>
-          <p:cNvSpPr>
-            <a:spLocks xmlns:a="http://schemas.openxmlformats.org/drawingml/2006/main" noGrp="1"/>
-          </p:cNvSpPr>
-          <p:nvPr>
-            <p:ph type="sldNum" idx="5"/>
-          </p:nvPr>
-        </p:nvSpPr>
-        <p:spPr/>
-        <p:txBody>
-          <a:bodyPr xmlns:a="http://schemas.openxmlformats.org/drawingml/2006/main"/>
-          <a:lstStyle xmlns:a="http://schemas.openxmlformats.org/drawingml/2006/main"/>
-          <a:p xmlns:a="http://schemas.openxmlformats.org/drawingml/2006/main"/>
-        </p:txBody>
-      </p:sp>
-    </p:spTree>
-  </p:cSld>
-  <p:clrMapOvr>
-    <a:masterClrMapping xmlns:a="http://schemas.openxmlformats.org/drawingml/2006/main"/>
-  </p:clrMapOvr>
-</p:notes>
-</file>
-
-<file path=ppt/notesSlides/notesSlide13.xml><?xml version="1.0" encoding="utf-8"?>
-<p:notes xmlns:p="http://schemas.openxmlformats.org/presentationml/2006/main">
-  <p:cSld>
-    <p:spTree>
-      <p:nvGrpSpPr>
-        <p:cNvPr id="1" name=""/>
-        <p:cNvGrpSpPr/>
-        <p:nvPr/>
-      </p:nvGrpSpPr>
-      <p:grpSpPr>
-        <a:xfrm xmlns:a="http://schemas.openxmlformats.org/drawingml/2006/main"/>
-      </p:grpSpPr>
-      <p:sp>
-        <p:nvSpPr>
-          <p:cNvPr id="2" name="Slide Image Placeholder 1"/>
-          <p:cNvSpPr>
-            <a:spLocks xmlns:a="http://schemas.openxmlformats.org/drawingml/2006/main" noGrp="1"/>
-          </p:cNvSpPr>
-          <p:nvPr>
-            <p:ph type="sldImg" idx="0"/>
-          </p:nvPr>
-        </p:nvSpPr>
-        <p:spPr/>
-      </p:sp>
-      <p:sp>
-        <p:nvSpPr>
-          <p:cNvPr id="3" name="Notes Placeholder 2"/>
-          <p:cNvSpPr>
-            <a:spLocks xmlns:a="http://schemas.openxmlformats.org/drawingml/2006/main" noGrp="1"/>
-          </p:cNvSpPr>
-          <p:nvPr>
-            <p:ph type="body" idx="1"/>
-          </p:nvPr>
-        </p:nvSpPr>
-        <p:spPr/>
-        <p:txBody>
-          <a:bodyPr xmlns:a="http://schemas.openxmlformats.org/drawingml/2006/main"/>
-          <a:lstStyle xmlns:a="http://schemas.openxmlformats.org/drawingml/2006/main"/>
-          <a:p xmlns:a="http://schemas.openxmlformats.org/drawingml/2006/main">
-            <a:r>
-              <a:t>這頁對應 Flask 專案測試。</a:t>
-            </a:r>
-          </a:p>
-        </p:txBody>
-      </p:sp>
-      <p:sp>
-        <p:nvSpPr>
-          <p:cNvPr id="4" name="Slide Number Placeholder 3"/>
-          <p:cNvSpPr>
-            <a:spLocks xmlns:a="http://schemas.openxmlformats.org/drawingml/2006/main" noGrp="1"/>
-          </p:cNvSpPr>
-          <p:nvPr>
-            <p:ph type="sldNum" idx="5"/>
-          </p:nvPr>
-        </p:nvSpPr>
-        <p:spPr/>
-        <p:txBody>
-          <a:bodyPr xmlns:a="http://schemas.openxmlformats.org/drawingml/2006/main"/>
-          <a:lstStyle xmlns:a="http://schemas.openxmlformats.org/drawingml/2006/main"/>
-          <a:p xmlns:a="http://schemas.openxmlformats.org/drawingml/2006/main"/>
-        </p:txBody>
-      </p:sp>
-    </p:spTree>
-  </p:cSld>
-  <p:clrMapOvr>
-    <a:masterClrMapping xmlns:a="http://schemas.openxmlformats.org/drawingml/2006/main"/>
-  </p:clrMapOvr>
-</p:notes>
-</file>
-
-<file path=ppt/notesSlides/notesSlide14.xml><?xml version="1.0" encoding="utf-8"?>
-<p:notes xmlns:p="http://schemas.openxmlformats.org/presentationml/2006/main">
-  <p:cSld>
-    <p:spTree>
-      <p:nvGrpSpPr>
-        <p:cNvPr id="1" name=""/>
-        <p:cNvGrpSpPr/>
-        <p:nvPr/>
-      </p:nvGrpSpPr>
-      <p:grpSpPr>
-        <a:xfrm xmlns:a="http://schemas.openxmlformats.org/drawingml/2006/main"/>
-      </p:grpSpPr>
-      <p:sp>
-        <p:nvSpPr>
-          <p:cNvPr id="2" name="Slide Image Placeholder 1"/>
-          <p:cNvSpPr>
-            <a:spLocks xmlns:a="http://schemas.openxmlformats.org/drawingml/2006/main" noGrp="1"/>
-          </p:cNvSpPr>
-          <p:nvPr>
-            <p:ph type="sldImg" idx="0"/>
-          </p:nvPr>
-        </p:nvSpPr>
-        <p:spPr/>
-      </p:sp>
-      <p:sp>
-        <p:nvSpPr>
-          <p:cNvPr id="3" name="Notes Placeholder 2"/>
-          <p:cNvSpPr>
-            <a:spLocks xmlns:a="http://schemas.openxmlformats.org/drawingml/2006/main" noGrp="1"/>
-          </p:cNvSpPr>
-          <p:nvPr>
-            <p:ph type="body" idx="1"/>
-          </p:nvPr>
-        </p:nvSpPr>
-        <p:spPr/>
-        <p:txBody>
-          <a:bodyPr xmlns:a="http://schemas.openxmlformats.org/drawingml/2006/main"/>
-          <a:lstStyle xmlns:a="http://schemas.openxmlformats.org/drawingml/2006/main"/>
-          <a:p xmlns:a="http://schemas.openxmlformats.org/drawingml/2006/main">
-            <a:r>
-              <a:t>這頁把 Dockerfile 和 .dockerignore 放一起，連回第四堂。</a:t>
-            </a:r>
-          </a:p>
-        </p:txBody>
-      </p:sp>
-      <p:sp>
-        <p:nvSpPr>
-          <p:cNvPr id="4" name="Slide Number Placeholder 3"/>
-          <p:cNvSpPr>
-            <a:spLocks xmlns:a="http://schemas.openxmlformats.org/drawingml/2006/main" noGrp="1"/>
-          </p:cNvSpPr>
-          <p:nvPr>
-            <p:ph type="sldNum" idx="5"/>
-          </p:nvPr>
-        </p:nvSpPr>
-        <p:spPr/>
-        <p:txBody>
-          <a:bodyPr xmlns:a="http://schemas.openxmlformats.org/drawingml/2006/main"/>
-          <a:lstStyle xmlns:a="http://schemas.openxmlformats.org/drawingml/2006/main"/>
-          <a:p xmlns:a="http://schemas.openxmlformats.org/drawingml/2006/main"/>
-        </p:txBody>
-      </p:sp>
-    </p:spTree>
-  </p:cSld>
-  <p:clrMapOvr>
-    <a:masterClrMapping xmlns:a="http://schemas.openxmlformats.org/drawingml/2006/main"/>
-  </p:clrMapOvr>
-</p:notes>
-</file>
-
-<file path=ppt/notesSlides/notesSlide15.xml><?xml version="1.0" encoding="utf-8"?>
-<p:notes xmlns:p="http://schemas.openxmlformats.org/presentationml/2006/main">
-  <p:cSld>
-    <p:spTree>
-      <p:nvGrpSpPr>
-        <p:cNvPr id="1" name=""/>
-        <p:cNvGrpSpPr/>
-        <p:nvPr/>
-      </p:nvGrpSpPr>
-      <p:grpSpPr>
-        <a:xfrm xmlns:a="http://schemas.openxmlformats.org/drawingml/2006/main"/>
-      </p:grpSpPr>
-      <p:sp>
-        <p:nvSpPr>
-          <p:cNvPr id="2" name="Slide Image Placeholder 1"/>
-          <p:cNvSpPr>
-            <a:spLocks xmlns:a="http://schemas.openxmlformats.org/drawingml/2006/main" noGrp="1"/>
-          </p:cNvSpPr>
-          <p:nvPr>
-            <p:ph type="sldImg" idx="0"/>
-          </p:nvPr>
-        </p:nvSpPr>
-        <p:spPr/>
-      </p:sp>
-      <p:sp>
-        <p:nvSpPr>
-          <p:cNvPr id="3" name="Notes Placeholder 2"/>
-          <p:cNvSpPr>
-            <a:spLocks xmlns:a="http://schemas.openxmlformats.org/drawingml/2006/main" noGrp="1"/>
-          </p:cNvSpPr>
-          <p:nvPr>
-            <p:ph type="body" idx="1"/>
-          </p:nvPr>
-        </p:nvSpPr>
-        <p:spPr/>
-        <p:txBody>
-          <a:bodyPr xmlns:a="http://schemas.openxmlformats.org/drawingml/2006/main"/>
-          <a:lstStyle xmlns:a="http://schemas.openxmlformats.org/drawingml/2006/main"/>
-          <a:p xmlns:a="http://schemas.openxmlformats.org/drawingml/2006/main">
-            <a:r>
-              <a:t>練習題來自 exercises.md 第 6 堂實作題 P1。</a:t>
-            </a:r>
-          </a:p>
-        </p:txBody>
-      </p:sp>
-      <p:sp>
-        <p:nvSpPr>
-          <p:cNvPr id="4" name="Slide Number Placeholder 3"/>
-          <p:cNvSpPr>
-            <a:spLocks xmlns:a="http://schemas.openxmlformats.org/drawingml/2006/main" noGrp="1"/>
-          </p:cNvSpPr>
-          <p:nvPr>
-            <p:ph type="sldNum" idx="5"/>
-          </p:nvPr>
-        </p:nvSpPr>
-        <p:spPr/>
-        <p:txBody>
-          <a:bodyPr xmlns:a="http://schemas.openxmlformats.org/drawingml/2006/main"/>
-          <a:lstStyle xmlns:a="http://schemas.openxmlformats.org/drawingml/2006/main"/>
-          <a:p xmlns:a="http://schemas.openxmlformats.org/drawingml/2006/main"/>
-        </p:txBody>
-      </p:sp>
-    </p:spTree>
-  </p:cSld>
-  <p:clrMapOvr>
-    <a:masterClrMapping xmlns:a="http://schemas.openxmlformats.org/drawingml/2006/main"/>
-  </p:clrMapOvr>
-</p:notes>
-</file>
-
-<file path=ppt/notesSlides/notesSlide16.xml><?xml version="1.0" encoding="utf-8"?>
-<p:notes xmlns:p="http://schemas.openxmlformats.org/presentationml/2006/main">
-  <p:cSld>
-    <p:spTree>
-      <p:nvGrpSpPr>
-        <p:cNvPr id="1" name=""/>
-        <p:cNvGrpSpPr/>
-        <p:nvPr/>
-      </p:nvGrpSpPr>
-      <p:grpSpPr>
-        <a:xfrm xmlns:a="http://schemas.openxmlformats.org/drawingml/2006/main"/>
-      </p:grpSpPr>
-      <p:sp>
-        <p:nvSpPr>
-          <p:cNvPr id="2" name="Slide Image Placeholder 1"/>
-          <p:cNvSpPr>
-            <a:spLocks xmlns:a="http://schemas.openxmlformats.org/drawingml/2006/main" noGrp="1"/>
-          </p:cNvSpPr>
-          <p:nvPr>
-            <p:ph type="sldImg" idx="0"/>
-          </p:nvPr>
-        </p:nvSpPr>
-        <p:spPr/>
-      </p:sp>
-      <p:sp>
-        <p:nvSpPr>
-          <p:cNvPr id="3" name="Notes Placeholder 2"/>
-          <p:cNvSpPr>
-            <a:spLocks xmlns:a="http://schemas.openxmlformats.org/drawingml/2006/main" noGrp="1"/>
-          </p:cNvSpPr>
-          <p:nvPr>
-            <p:ph type="body" idx="1"/>
-          </p:nvPr>
-        </p:nvSpPr>
-        <p:spPr/>
-        <p:txBody>
-          <a:bodyPr xmlns:a="http://schemas.openxmlformats.org/drawingml/2006/main"/>
-          <a:lstStyle xmlns:a="http://schemas.openxmlformats.org/drawingml/2006/main"/>
-          <a:p xmlns:a="http://schemas.openxmlformats.org/drawingml/2006/main">
-            <a:r>
-              <a:t>完整 workflow 很長，先用骨架理解。</a:t>
-            </a:r>
-          </a:p>
-        </p:txBody>
-      </p:sp>
-      <p:sp>
-        <p:nvSpPr>
-          <p:cNvPr id="4" name="Slide Number Placeholder 3"/>
-          <p:cNvSpPr>
-            <a:spLocks xmlns:a="http://schemas.openxmlformats.org/drawingml/2006/main" noGrp="1"/>
-          </p:cNvSpPr>
-          <p:nvPr>
-            <p:ph type="sldNum" idx="5"/>
-          </p:nvPr>
-        </p:nvSpPr>
-        <p:spPr/>
-        <p:txBody>
-          <a:bodyPr xmlns:a="http://schemas.openxmlformats.org/drawingml/2006/main"/>
-          <a:lstStyle xmlns:a="http://schemas.openxmlformats.org/drawingml/2006/main"/>
-          <a:p xmlns:a="http://schemas.openxmlformats.org/drawingml/2006/main"/>
-        </p:txBody>
-      </p:sp>
-    </p:spTree>
-  </p:cSld>
-  <p:clrMapOvr>
-    <a:masterClrMapping xmlns:a="http://schemas.openxmlformats.org/drawingml/2006/main"/>
-  </p:clrMapOvr>
-</p:notes>
-</file>
-
-<file path=ppt/notesSlides/notesSlide17.xml><?xml version="1.0" encoding="utf-8"?>
-<p:notes xmlns:p="http://schemas.openxmlformats.org/presentationml/2006/main">
-  <p:cSld>
-    <p:spTree>
-      <p:nvGrpSpPr>
-        <p:cNvPr id="1" name=""/>
-        <p:cNvGrpSpPr/>
-        <p:nvPr/>
-      </p:nvGrpSpPr>
-      <p:grpSpPr>
-        <a:xfrm xmlns:a="http://schemas.openxmlformats.org/drawingml/2006/main"/>
-      </p:grpSpPr>
-      <p:sp>
-        <p:nvSpPr>
-          <p:cNvPr id="2" name="Slide Image Placeholder 1"/>
-          <p:cNvSpPr>
-            <a:spLocks xmlns:a="http://schemas.openxmlformats.org/drawingml/2006/main" noGrp="1"/>
-          </p:cNvSpPr>
-          <p:nvPr>
-            <p:ph type="sldImg" idx="0"/>
-          </p:nvPr>
-        </p:nvSpPr>
-        <p:spPr/>
-      </p:sp>
-      <p:sp>
-        <p:nvSpPr>
-          <p:cNvPr id="3" name="Notes Placeholder 2"/>
-          <p:cNvSpPr>
-            <a:spLocks xmlns:a="http://schemas.openxmlformats.org/drawingml/2006/main" noGrp="1"/>
-          </p:cNvSpPr>
-          <p:nvPr>
-            <p:ph type="body" idx="1"/>
-          </p:nvPr>
-        </p:nvSpPr>
-        <p:spPr/>
-        <p:txBody>
-          <a:bodyPr xmlns:a="http://schemas.openxmlformats.org/drawingml/2006/main"/>
-          <a:lstStyle xmlns:a="http://schemas.openxmlformats.org/drawingml/2006/main"/>
-          <a:p xmlns:a="http://schemas.openxmlformats.org/drawingml/2006/main">
-            <a:r>
-              <a:t>這是完整 workflow 的 test job。</a:t>
-            </a:r>
-          </a:p>
-        </p:txBody>
-      </p:sp>
-      <p:sp>
-        <p:nvSpPr>
-          <p:cNvPr id="4" name="Slide Number Placeholder 3"/>
-          <p:cNvSpPr>
-            <a:spLocks xmlns:a="http://schemas.openxmlformats.org/drawingml/2006/main" noGrp="1"/>
-          </p:cNvSpPr>
-          <p:nvPr>
-            <p:ph type="sldNum" idx="5"/>
-          </p:nvPr>
-        </p:nvSpPr>
-        <p:spPr/>
-        <p:txBody>
-          <a:bodyPr xmlns:a="http://schemas.openxmlformats.org/drawingml/2006/main"/>
-          <a:lstStyle xmlns:a="http://schemas.openxmlformats.org/drawingml/2006/main"/>
-          <a:p xmlns:a="http://schemas.openxmlformats.org/drawingml/2006/main"/>
-        </p:txBody>
-      </p:sp>
-    </p:spTree>
-  </p:cSld>
-  <p:clrMapOvr>
-    <a:masterClrMapping xmlns:a="http://schemas.openxmlformats.org/drawingml/2006/main"/>
-  </p:clrMapOvr>
-</p:notes>
-</file>
-
-<file path=ppt/notesSlides/notesSlide18.xml><?xml version="1.0" encoding="utf-8"?>
-<p:notes xmlns:p="http://schemas.openxmlformats.org/presentationml/2006/main">
-  <p:cSld>
-    <p:spTree>
-      <p:nvGrpSpPr>
-        <p:cNvPr id="1" name=""/>
-        <p:cNvGrpSpPr/>
-        <p:nvPr/>
-      </p:nvGrpSpPr>
-      <p:grpSpPr>
-        <a:xfrm xmlns:a="http://schemas.openxmlformats.org/drawingml/2006/main"/>
-      </p:grpSpPr>
-      <p:sp>
-        <p:nvSpPr>
-          <p:cNvPr id="2" name="Slide Image Placeholder 1"/>
-          <p:cNvSpPr>
-            <a:spLocks xmlns:a="http://schemas.openxmlformats.org/drawingml/2006/main" noGrp="1"/>
-          </p:cNvSpPr>
-          <p:nvPr>
-            <p:ph type="sldImg" idx="0"/>
-          </p:nvPr>
-        </p:nvSpPr>
-        <p:spPr/>
-      </p:sp>
-      <p:sp>
-        <p:nvSpPr>
-          <p:cNvPr id="3" name="Notes Placeholder 2"/>
-          <p:cNvSpPr>
-            <a:spLocks xmlns:a="http://schemas.openxmlformats.org/drawingml/2006/main" noGrp="1"/>
-          </p:cNvSpPr>
-          <p:nvPr>
-            <p:ph type="body" idx="1"/>
-          </p:nvPr>
-        </p:nvSpPr>
-        <p:spPr/>
-        <p:txBody>
-          <a:bodyPr xmlns:a="http://schemas.openxmlformats.org/drawingml/2006/main"/>
-          <a:lstStyle xmlns:a="http://schemas.openxmlformats.org/drawingml/2006/main"/>
-          <a:p xmlns:a="http://schemas.openxmlformats.org/drawingml/2006/main">
-            <a:r>
-              <a:t>這頁說明 docker job 的 gating 設計。</a:t>
-            </a:r>
-          </a:p>
-        </p:txBody>
-      </p:sp>
-      <p:sp>
-        <p:nvSpPr>
-          <p:cNvPr id="4" name="Slide Number Placeholder 3"/>
-          <p:cNvSpPr>
-            <a:spLocks xmlns:a="http://schemas.openxmlformats.org/drawingml/2006/main" noGrp="1"/>
-          </p:cNvSpPr>
-          <p:nvPr>
-            <p:ph type="sldNum" idx="5"/>
-          </p:nvPr>
-        </p:nvSpPr>
-        <p:spPr/>
-        <p:txBody>
-          <a:bodyPr xmlns:a="http://schemas.openxmlformats.org/drawingml/2006/main"/>
-          <a:lstStyle xmlns:a="http://schemas.openxmlformats.org/drawingml/2006/main"/>
-          <a:p xmlns:a="http://schemas.openxmlformats.org/drawingml/2006/main"/>
-        </p:txBody>
-      </p:sp>
-    </p:spTree>
-  </p:cSld>
-  <p:clrMapOvr>
-    <a:masterClrMapping xmlns:a="http://schemas.openxmlformats.org/drawingml/2006/main"/>
-  </p:clrMapOvr>
-</p:notes>
-</file>
-
-<file path=ppt/notesSlides/notesSlide19.xml><?xml version="1.0" encoding="utf-8"?>
-<p:notes xmlns:p="http://schemas.openxmlformats.org/presentationml/2006/main">
-  <p:cSld>
-    <p:spTree>
-      <p:nvGrpSpPr>
-        <p:cNvPr id="1" name=""/>
-        <p:cNvGrpSpPr/>
-        <p:nvPr/>
-      </p:nvGrpSpPr>
-      <p:grpSpPr>
-        <a:xfrm xmlns:a="http://schemas.openxmlformats.org/drawingml/2006/main"/>
-      </p:grpSpPr>
-      <p:sp>
-        <p:nvSpPr>
-          <p:cNvPr id="2" name="Slide Image Placeholder 1"/>
-          <p:cNvSpPr>
-            <a:spLocks xmlns:a="http://schemas.openxmlformats.org/drawingml/2006/main" noGrp="1"/>
-          </p:cNvSpPr>
-          <p:nvPr>
-            <p:ph type="sldImg" idx="0"/>
-          </p:nvPr>
-        </p:nvSpPr>
-        <p:spPr/>
-      </p:sp>
-      <p:sp>
-        <p:nvSpPr>
-          <p:cNvPr id="3" name="Notes Placeholder 2"/>
-          <p:cNvSpPr>
-            <a:spLocks xmlns:a="http://schemas.openxmlformats.org/drawingml/2006/main" noGrp="1"/>
-          </p:cNvSpPr>
-          <p:nvPr>
-            <p:ph type="body" idx="1"/>
-          </p:nvPr>
-        </p:nvSpPr>
-        <p:spPr/>
-        <p:txBody>
-          <a:bodyPr xmlns:a="http://schemas.openxmlformats.org/drawingml/2006/main"/>
-          <a:lstStyle xmlns:a="http://schemas.openxmlformats.org/drawingml/2006/main"/>
-          <a:p xmlns:a="http://schemas.openxmlformats.org/drawingml/2006/main">
-            <a:r>
-              <a:t>這頁對應 version step 與 tags。</a:t>
-            </a:r>
-          </a:p>
-        </p:txBody>
-      </p:sp>
-      <p:sp>
-        <p:nvSpPr>
-          <p:cNvPr id="4" name="Slide Number Placeholder 3"/>
-          <p:cNvSpPr>
-            <a:spLocks xmlns:a="http://schemas.openxmlformats.org/drawingml/2006/main" noGrp="1"/>
-          </p:cNvSpPr>
-          <p:nvPr>
-            <p:ph type="sldNum" idx="5"/>
-          </p:nvPr>
-        </p:nvSpPr>
-        <p:spPr/>
-        <p:txBody>
-          <a:bodyPr xmlns:a="http://schemas.openxmlformats.org/drawingml/2006/main"/>
-          <a:lstStyle xmlns:a="http://schemas.openxmlformats.org/drawingml/2006/main"/>
-          <a:p xmlns:a="http://schemas.openxmlformats.org/drawingml/2006/main"/>
-        </p:txBody>
-      </p:sp>
-    </p:spTree>
-  </p:cSld>
-  <p:clrMapOvr>
-    <a:masterClrMapping xmlns:a="http://schemas.openxmlformats.org/drawingml/2006/main"/>
-  </p:clrMapOvr>
-</p:notes>
-</file>
-
-<file path=ppt/notesSlides/notesSlide2.xml><?xml version="1.0" encoding="utf-8"?>
-<p:notes xmlns:p="http://schemas.openxmlformats.org/presentationml/2006/main">
-  <p:cSld>
-    <p:spTree>
-      <p:nvGrpSpPr>
-        <p:cNvPr id="1" name=""/>
-        <p:cNvGrpSpPr/>
-        <p:nvPr/>
-      </p:nvGrpSpPr>
-      <p:grpSpPr>
-        <a:xfrm xmlns:a="http://schemas.openxmlformats.org/drawingml/2006/main"/>
-      </p:grpSpPr>
-      <p:sp>
-        <p:nvSpPr>
-          <p:cNvPr id="2" name="Slide Image Placeholder 1"/>
-          <p:cNvSpPr>
-            <a:spLocks xmlns:a="http://schemas.openxmlformats.org/drawingml/2006/main" noGrp="1"/>
-          </p:cNvSpPr>
-          <p:nvPr>
-            <p:ph type="sldImg" idx="0"/>
-          </p:nvPr>
-        </p:nvSpPr>
-        <p:spPr/>
-      </p:sp>
-      <p:sp>
-        <p:nvSpPr>
-          <p:cNvPr id="3" name="Notes Placeholder 2"/>
-          <p:cNvSpPr>
-            <a:spLocks xmlns:a="http://schemas.openxmlformats.org/drawingml/2006/main" noGrp="1"/>
-          </p:cNvSpPr>
-          <p:nvPr>
-            <p:ph type="body" idx="1"/>
-          </p:nvPr>
-        </p:nvSpPr>
-        <p:spPr/>
-        <p:txBody>
-          <a:bodyPr xmlns:a="http://schemas.openxmlformats.org/drawingml/2006/main"/>
-          <a:lstStyle xmlns:a="http://schemas.openxmlformats.org/drawingml/2006/main"/>
-          <a:p xmlns:a="http://schemas.openxmlformats.org/drawingml/2006/main">
-            <a:r>
-              <a:t>第六堂有總結性質，節奏上要讓學生知道前半是語法，後半是完整專案。</a:t>
-            </a:r>
-          </a:p>
-        </p:txBody>
-      </p:sp>
-      <p:sp>
-        <p:nvSpPr>
-          <p:cNvPr id="4" name="Slide Number Placeholder 3"/>
-          <p:cNvSpPr>
-            <a:spLocks xmlns:a="http://schemas.openxmlformats.org/drawingml/2006/main" noGrp="1"/>
-          </p:cNvSpPr>
-          <p:nvPr>
-            <p:ph type="sldNum" idx="5"/>
-          </p:nvPr>
-        </p:nvSpPr>
-        <p:spPr/>
-        <p:txBody>
-          <a:bodyPr xmlns:a="http://schemas.openxmlformats.org/drawingml/2006/main"/>
-          <a:lstStyle xmlns:a="http://schemas.openxmlformats.org/drawingml/2006/main"/>
-          <a:p xmlns:a="http://schemas.openxmlformats.org/drawingml/2006/main"/>
-        </p:txBody>
-      </p:sp>
-    </p:spTree>
-  </p:cSld>
-  <p:clrMapOvr>
-    <a:masterClrMapping xmlns:a="http://schemas.openxmlformats.org/drawingml/2006/main"/>
-  </p:clrMapOvr>
-</p:notes>
-</file>
-
-<file path=ppt/notesSlides/notesSlide20.xml><?xml version="1.0" encoding="utf-8"?>
-<p:notes xmlns:p="http://schemas.openxmlformats.org/presentationml/2006/main">
-  <p:cSld>
-    <p:spTree>
-      <p:nvGrpSpPr>
-        <p:cNvPr id="1" name=""/>
-        <p:cNvGrpSpPr/>
-        <p:nvPr/>
-      </p:nvGrpSpPr>
-      <p:grpSpPr>
-        <a:xfrm xmlns:a="http://schemas.openxmlformats.org/drawingml/2006/main"/>
-      </p:grpSpPr>
-      <p:sp>
-        <p:nvSpPr>
-          <p:cNvPr id="2" name="Slide Image Placeholder 1"/>
-          <p:cNvSpPr>
-            <a:spLocks xmlns:a="http://schemas.openxmlformats.org/drawingml/2006/main" noGrp="1"/>
-          </p:cNvSpPr>
-          <p:nvPr>
-            <p:ph type="sldImg" idx="0"/>
-          </p:nvPr>
-        </p:nvSpPr>
-        <p:spPr/>
-      </p:sp>
-      <p:sp>
-        <p:nvSpPr>
-          <p:cNvPr id="3" name="Notes Placeholder 2"/>
-          <p:cNvSpPr>
-            <a:spLocks xmlns:a="http://schemas.openxmlformats.org/drawingml/2006/main" noGrp="1"/>
-          </p:cNvSpPr>
-          <p:nvPr>
-            <p:ph type="body" idx="1"/>
-          </p:nvPr>
-        </p:nvSpPr>
-        <p:spPr/>
-        <p:txBody>
-          <a:bodyPr xmlns:a="http://schemas.openxmlformats.org/drawingml/2006/main"/>
-          <a:lstStyle xmlns:a="http://schemas.openxmlformats.org/drawingml/2006/main"/>
-          <a:p xmlns:a="http://schemas.openxmlformats.org/drawingml/2006/main">
-            <a:r>
-              <a:t>這頁對應 workflow 最後輸出部署資訊。</a:t>
-            </a:r>
-          </a:p>
-        </p:txBody>
-      </p:sp>
-      <p:sp>
-        <p:nvSpPr>
-          <p:cNvPr id="4" name="Slide Number Placeholder 3"/>
-          <p:cNvSpPr>
-            <a:spLocks xmlns:a="http://schemas.openxmlformats.org/drawingml/2006/main" noGrp="1"/>
-          </p:cNvSpPr>
-          <p:nvPr>
-            <p:ph type="sldNum" idx="5"/>
-          </p:nvPr>
-        </p:nvSpPr>
-        <p:spPr/>
-        <p:txBody>
-          <a:bodyPr xmlns:a="http://schemas.openxmlformats.org/drawingml/2006/main"/>
-          <a:lstStyle xmlns:a="http://schemas.openxmlformats.org/drawingml/2006/main"/>
-          <a:p xmlns:a="http://schemas.openxmlformats.org/drawingml/2006/main"/>
-        </p:txBody>
-      </p:sp>
-    </p:spTree>
-  </p:cSld>
-  <p:clrMapOvr>
-    <a:masterClrMapping xmlns:a="http://schemas.openxmlformats.org/drawingml/2006/main"/>
-  </p:clrMapOvr>
-</p:notes>
-</file>
-
-<file path=ppt/notesSlides/notesSlide21.xml><?xml version="1.0" encoding="utf-8"?>
-<p:notes xmlns:p="http://schemas.openxmlformats.org/presentationml/2006/main">
-  <p:cSld>
-    <p:spTree>
-      <p:nvGrpSpPr>
-        <p:cNvPr id="1" name=""/>
-        <p:cNvGrpSpPr/>
-        <p:nvPr/>
-      </p:nvGrpSpPr>
-      <p:grpSpPr>
-        <a:xfrm xmlns:a="http://schemas.openxmlformats.org/drawingml/2006/main"/>
-      </p:grpSpPr>
-      <p:sp>
-        <p:nvSpPr>
-          <p:cNvPr id="2" name="Slide Image Placeholder 1"/>
-          <p:cNvSpPr>
-            <a:spLocks xmlns:a="http://schemas.openxmlformats.org/drawingml/2006/main" noGrp="1"/>
-          </p:cNvSpPr>
-          <p:nvPr>
-            <p:ph type="sldImg" idx="0"/>
-          </p:nvPr>
-        </p:nvSpPr>
-        <p:spPr/>
-      </p:sp>
-      <p:sp>
-        <p:nvSpPr>
-          <p:cNvPr id="3" name="Notes Placeholder 2"/>
-          <p:cNvSpPr>
-            <a:spLocks xmlns:a="http://schemas.openxmlformats.org/drawingml/2006/main" noGrp="1"/>
-          </p:cNvSpPr>
-          <p:nvPr>
-            <p:ph type="body" idx="1"/>
-          </p:nvPr>
-        </p:nvSpPr>
-        <p:spPr/>
-        <p:txBody>
-          <a:bodyPr xmlns:a="http://schemas.openxmlformats.org/drawingml/2006/main"/>
-          <a:lstStyle xmlns:a="http://schemas.openxmlformats.org/drawingml/2006/main"/>
-          <a:p xmlns:a="http://schemas.openxmlformats.org/drawingml/2006/main">
-            <a:r>
-              <a:t>這一步很重要：CI 成功不代表 image 一定能被使用。</a:t>
-            </a:r>
-          </a:p>
-        </p:txBody>
-      </p:sp>
-      <p:sp>
-        <p:nvSpPr>
-          <p:cNvPr id="4" name="Slide Number Placeholder 3"/>
-          <p:cNvSpPr>
-            <a:spLocks xmlns:a="http://schemas.openxmlformats.org/drawingml/2006/main" noGrp="1"/>
-          </p:cNvSpPr>
-          <p:nvPr>
-            <p:ph type="sldNum" idx="5"/>
-          </p:nvPr>
-        </p:nvSpPr>
-        <p:spPr/>
-        <p:txBody>
-          <a:bodyPr xmlns:a="http://schemas.openxmlformats.org/drawingml/2006/main"/>
-          <a:lstStyle xmlns:a="http://schemas.openxmlformats.org/drawingml/2006/main"/>
-          <a:p xmlns:a="http://schemas.openxmlformats.org/drawingml/2006/main"/>
-        </p:txBody>
-      </p:sp>
-    </p:spTree>
-  </p:cSld>
-  <p:clrMapOvr>
-    <a:masterClrMapping xmlns:a="http://schemas.openxmlformats.org/drawingml/2006/main"/>
-  </p:clrMapOvr>
-</p:notes>
-</file>
-
-<file path=ppt/notesSlides/notesSlide22.xml><?xml version="1.0" encoding="utf-8"?>
-<p:notes xmlns:p="http://schemas.openxmlformats.org/presentationml/2006/main">
-  <p:cSld>
-    <p:spTree>
-      <p:nvGrpSpPr>
-        <p:cNvPr id="1" name=""/>
-        <p:cNvGrpSpPr/>
-        <p:nvPr/>
-      </p:nvGrpSpPr>
-      <p:grpSpPr>
-        <a:xfrm xmlns:a="http://schemas.openxmlformats.org/drawingml/2006/main"/>
-      </p:grpSpPr>
-      <p:sp>
-        <p:nvSpPr>
-          <p:cNvPr id="2" name="Slide Image Placeholder 1"/>
-          <p:cNvSpPr>
-            <a:spLocks xmlns:a="http://schemas.openxmlformats.org/drawingml/2006/main" noGrp="1"/>
-          </p:cNvSpPr>
-          <p:nvPr>
-            <p:ph type="sldImg" idx="0"/>
-          </p:nvPr>
-        </p:nvSpPr>
-        <p:spPr/>
-      </p:sp>
-      <p:sp>
-        <p:nvSpPr>
-          <p:cNvPr id="3" name="Notes Placeholder 2"/>
-          <p:cNvSpPr>
-            <a:spLocks xmlns:a="http://schemas.openxmlformats.org/drawingml/2006/main" noGrp="1"/>
-          </p:cNvSpPr>
-          <p:nvPr>
-            <p:ph type="body" idx="1"/>
-          </p:nvPr>
-        </p:nvSpPr>
-        <p:spPr/>
-        <p:txBody>
-          <a:bodyPr xmlns:a="http://schemas.openxmlformats.org/drawingml/2006/main"/>
-          <a:lstStyle xmlns:a="http://schemas.openxmlformats.org/drawingml/2006/main"/>
-          <a:p xmlns:a="http://schemas.openxmlformats.org/drawingml/2006/main">
-            <a:r>
-              <a:t>這是 exercises.md 第 6 堂挑戰題 C1，也呼應 session6.md 課堂練習 1。</a:t>
-            </a:r>
-          </a:p>
-        </p:txBody>
-      </p:sp>
-      <p:sp>
-        <p:nvSpPr>
-          <p:cNvPr id="4" name="Slide Number Placeholder 3"/>
-          <p:cNvSpPr>
-            <a:spLocks xmlns:a="http://schemas.openxmlformats.org/drawingml/2006/main" noGrp="1"/>
-          </p:cNvSpPr>
-          <p:nvPr>
-            <p:ph type="sldNum" idx="5"/>
-          </p:nvPr>
-        </p:nvSpPr>
-        <p:spPr/>
-        <p:txBody>
-          <a:bodyPr xmlns:a="http://schemas.openxmlformats.org/drawingml/2006/main"/>
-          <a:lstStyle xmlns:a="http://schemas.openxmlformats.org/drawingml/2006/main"/>
-          <a:p xmlns:a="http://schemas.openxmlformats.org/drawingml/2006/main"/>
-        </p:txBody>
-      </p:sp>
-    </p:spTree>
-  </p:cSld>
-  <p:clrMapOvr>
-    <a:masterClrMapping xmlns:a="http://schemas.openxmlformats.org/drawingml/2006/main"/>
-  </p:clrMapOvr>
-</p:notes>
-</file>
-
-<file path=ppt/notesSlides/notesSlide23.xml><?xml version="1.0" encoding="utf-8"?>
-<p:notes xmlns:p="http://schemas.openxmlformats.org/presentationml/2006/main">
-  <p:cSld>
-    <p:spTree>
-      <p:nvGrpSpPr>
-        <p:cNvPr id="1" name=""/>
-        <p:cNvGrpSpPr/>
-        <p:nvPr/>
-      </p:nvGrpSpPr>
-      <p:grpSpPr>
-        <a:xfrm xmlns:a="http://schemas.openxmlformats.org/drawingml/2006/main"/>
-      </p:grpSpPr>
-      <p:sp>
-        <p:nvSpPr>
-          <p:cNvPr id="2" name="Slide Image Placeholder 1"/>
-          <p:cNvSpPr>
-            <a:spLocks xmlns:a="http://schemas.openxmlformats.org/drawingml/2006/main" noGrp="1"/>
-          </p:cNvSpPr>
-          <p:nvPr>
-            <p:ph type="sldImg" idx="0"/>
-          </p:nvPr>
-        </p:nvSpPr>
-        <p:spPr/>
-      </p:sp>
-      <p:sp>
-        <p:nvSpPr>
-          <p:cNvPr id="3" name="Notes Placeholder 2"/>
-          <p:cNvSpPr>
-            <a:spLocks xmlns:a="http://schemas.openxmlformats.org/drawingml/2006/main" noGrp="1"/>
-          </p:cNvSpPr>
-          <p:nvPr>
-            <p:ph type="body" idx="1"/>
-          </p:nvPr>
-        </p:nvSpPr>
-        <p:spPr/>
-        <p:txBody>
-          <a:bodyPr xmlns:a="http://schemas.openxmlformats.org/drawingml/2006/main"/>
-          <a:lstStyle xmlns:a="http://schemas.openxmlformats.org/drawingml/2006/main"/>
-          <a:p xmlns:a="http://schemas.openxmlformats.org/drawingml/2006/main">
-            <a:r>
-              <a:t>Badge 是給 repo 訪客看的狀態入口。</a:t>
-            </a:r>
-          </a:p>
-        </p:txBody>
-      </p:sp>
-      <p:sp>
-        <p:nvSpPr>
-          <p:cNvPr id="4" name="Slide Number Placeholder 3"/>
-          <p:cNvSpPr>
-            <a:spLocks xmlns:a="http://schemas.openxmlformats.org/drawingml/2006/main" noGrp="1"/>
-          </p:cNvSpPr>
-          <p:nvPr>
-            <p:ph type="sldNum" idx="5"/>
-          </p:nvPr>
-        </p:nvSpPr>
-        <p:spPr/>
-        <p:txBody>
-          <a:bodyPr xmlns:a="http://schemas.openxmlformats.org/drawingml/2006/main"/>
-          <a:lstStyle xmlns:a="http://schemas.openxmlformats.org/drawingml/2006/main"/>
-          <a:p xmlns:a="http://schemas.openxmlformats.org/drawingml/2006/main"/>
-        </p:txBody>
-      </p:sp>
-    </p:spTree>
-  </p:cSld>
-  <p:clrMapOvr>
-    <a:masterClrMapping xmlns:a="http://schemas.openxmlformats.org/drawingml/2006/main"/>
-  </p:clrMapOvr>
-</p:notes>
-</file>
-
-<file path=ppt/notesSlides/notesSlide24.xml><?xml version="1.0" encoding="utf-8"?>
-<p:notes xmlns:p="http://schemas.openxmlformats.org/presentationml/2006/main">
-  <p:cSld>
-    <p:spTree>
-      <p:nvGrpSpPr>
-        <p:cNvPr id="1" name=""/>
-        <p:cNvGrpSpPr/>
-        <p:nvPr/>
-      </p:nvGrpSpPr>
-      <p:grpSpPr>
-        <a:xfrm xmlns:a="http://schemas.openxmlformats.org/drawingml/2006/main"/>
-      </p:grpSpPr>
-      <p:sp>
-        <p:nvSpPr>
-          <p:cNvPr id="2" name="Slide Image Placeholder 1"/>
-          <p:cNvSpPr>
-            <a:spLocks xmlns:a="http://schemas.openxmlformats.org/drawingml/2006/main" noGrp="1"/>
-          </p:cNvSpPr>
-          <p:nvPr>
-            <p:ph type="sldImg" idx="0"/>
-          </p:nvPr>
-        </p:nvSpPr>
-        <p:spPr/>
-      </p:sp>
-      <p:sp>
-        <p:nvSpPr>
-          <p:cNvPr id="3" name="Notes Placeholder 2"/>
-          <p:cNvSpPr>
-            <a:spLocks xmlns:a="http://schemas.openxmlformats.org/drawingml/2006/main" noGrp="1"/>
-          </p:cNvSpPr>
-          <p:nvPr>
-            <p:ph type="body" idx="1"/>
-          </p:nvPr>
-        </p:nvSpPr>
-        <p:spPr/>
-        <p:txBody>
-          <a:bodyPr xmlns:a="http://schemas.openxmlformats.org/drawingml/2006/main"/>
-          <a:lstStyle xmlns:a="http://schemas.openxmlformats.org/drawingml/2006/main"/>
-          <a:p xmlns:a="http://schemas.openxmlformats.org/drawingml/2006/main">
-            <a:r>
-              <a:t>練習題來自 exercises.md 第 6 堂實作題 P2。</a:t>
-            </a:r>
-          </a:p>
-        </p:txBody>
-      </p:sp>
-      <p:sp>
-        <p:nvSpPr>
-          <p:cNvPr id="4" name="Slide Number Placeholder 3"/>
-          <p:cNvSpPr>
-            <a:spLocks xmlns:a="http://schemas.openxmlformats.org/drawingml/2006/main" noGrp="1"/>
-          </p:cNvSpPr>
-          <p:nvPr>
-            <p:ph type="sldNum" idx="5"/>
-          </p:nvPr>
-        </p:nvSpPr>
-        <p:spPr/>
-        <p:txBody>
-          <a:bodyPr xmlns:a="http://schemas.openxmlformats.org/drawingml/2006/main"/>
-          <a:lstStyle xmlns:a="http://schemas.openxmlformats.org/drawingml/2006/main"/>
-          <a:p xmlns:a="http://schemas.openxmlformats.org/drawingml/2006/main"/>
-        </p:txBody>
-      </p:sp>
-    </p:spTree>
-  </p:cSld>
-  <p:clrMapOvr>
-    <a:masterClrMapping xmlns:a="http://schemas.openxmlformats.org/drawingml/2006/main"/>
-  </p:clrMapOvr>
-</p:notes>
-</file>
-
-<file path=ppt/notesSlides/notesSlide25.xml><?xml version="1.0" encoding="utf-8"?>
-<p:notes xmlns:p="http://schemas.openxmlformats.org/presentationml/2006/main">
-  <p:cSld>
-    <p:spTree>
-      <p:nvGrpSpPr>
-        <p:cNvPr id="1" name=""/>
-        <p:cNvGrpSpPr/>
-        <p:nvPr/>
-      </p:nvGrpSpPr>
-      <p:grpSpPr>
-        <a:xfrm xmlns:a="http://schemas.openxmlformats.org/drawingml/2006/main"/>
-      </p:grpSpPr>
-      <p:sp>
-        <p:nvSpPr>
-          <p:cNvPr id="2" name="Slide Image Placeholder 1"/>
-          <p:cNvSpPr>
-            <a:spLocks xmlns:a="http://schemas.openxmlformats.org/drawingml/2006/main" noGrp="1"/>
-          </p:cNvSpPr>
-          <p:nvPr>
-            <p:ph type="sldImg" idx="0"/>
-          </p:nvPr>
-        </p:nvSpPr>
-        <p:spPr/>
-      </p:sp>
-      <p:sp>
-        <p:nvSpPr>
-          <p:cNvPr id="3" name="Notes Placeholder 2"/>
-          <p:cNvSpPr>
-            <a:spLocks xmlns:a="http://schemas.openxmlformats.org/drawingml/2006/main" noGrp="1"/>
-          </p:cNvSpPr>
-          <p:nvPr>
-            <p:ph type="body" idx="1"/>
-          </p:nvPr>
-        </p:nvSpPr>
-        <p:spPr/>
-        <p:txBody>
-          <a:bodyPr xmlns:a="http://schemas.openxmlformats.org/drawingml/2006/main"/>
-          <a:lstStyle xmlns:a="http://schemas.openxmlformats.org/drawingml/2006/main"/>
-          <a:p xmlns:a="http://schemas.openxmlformats.org/drawingml/2006/main">
-            <a:r>
-              <a:t>這頁對應 session6.md 快取依賴加速 CI。</a:t>
-            </a:r>
-          </a:p>
-        </p:txBody>
-      </p:sp>
-      <p:sp>
-        <p:nvSpPr>
-          <p:cNvPr id="4" name="Slide Number Placeholder 3"/>
-          <p:cNvSpPr>
-            <a:spLocks xmlns:a="http://schemas.openxmlformats.org/drawingml/2006/main" noGrp="1"/>
-          </p:cNvSpPr>
-          <p:nvPr>
-            <p:ph type="sldNum" idx="5"/>
-          </p:nvPr>
-        </p:nvSpPr>
-        <p:spPr/>
-        <p:txBody>
-          <a:bodyPr xmlns:a="http://schemas.openxmlformats.org/drawingml/2006/main"/>
-          <a:lstStyle xmlns:a="http://schemas.openxmlformats.org/drawingml/2006/main"/>
-          <a:p xmlns:a="http://schemas.openxmlformats.org/drawingml/2006/main"/>
-        </p:txBody>
-      </p:sp>
-    </p:spTree>
-  </p:cSld>
-  <p:clrMapOvr>
-    <a:masterClrMapping xmlns:a="http://schemas.openxmlformats.org/drawingml/2006/main"/>
-  </p:clrMapOvr>
-</p:notes>
-</file>
-
-<file path=ppt/notesSlides/notesSlide26.xml><?xml version="1.0" encoding="utf-8"?>
-<p:notes xmlns:p="http://schemas.openxmlformats.org/presentationml/2006/main">
-  <p:cSld>
-    <p:spTree>
-      <p:nvGrpSpPr>
-        <p:cNvPr id="1" name=""/>
-        <p:cNvGrpSpPr/>
-        <p:nvPr/>
-      </p:nvGrpSpPr>
-      <p:grpSpPr>
-        <a:xfrm xmlns:a="http://schemas.openxmlformats.org/drawingml/2006/main"/>
-      </p:grpSpPr>
-      <p:sp>
-        <p:nvSpPr>
-          <p:cNvPr id="2" name="Slide Image Placeholder 1"/>
-          <p:cNvSpPr>
-            <a:spLocks xmlns:a="http://schemas.openxmlformats.org/drawingml/2006/main" noGrp="1"/>
-          </p:cNvSpPr>
-          <p:nvPr>
-            <p:ph type="sldImg" idx="0"/>
-          </p:nvPr>
-        </p:nvSpPr>
-        <p:spPr/>
-      </p:sp>
-      <p:sp>
-        <p:nvSpPr>
-          <p:cNvPr id="3" name="Notes Placeholder 2"/>
-          <p:cNvSpPr>
-            <a:spLocks xmlns:a="http://schemas.openxmlformats.org/drawingml/2006/main" noGrp="1"/>
-          </p:cNvSpPr>
-          <p:nvPr>
-            <p:ph type="body" idx="1"/>
-          </p:nvPr>
-        </p:nvSpPr>
-        <p:spPr/>
-        <p:txBody>
-          <a:bodyPr xmlns:a="http://schemas.openxmlformats.org/drawingml/2006/main"/>
-          <a:lstStyle xmlns:a="http://schemas.openxmlformats.org/drawingml/2006/main"/>
-          <a:p xmlns:a="http://schemas.openxmlformats.org/drawingml/2006/main">
-            <a:r>
-              <a:t>練習題來自 exercises.md 第 6 堂實作題 P3。</a:t>
-            </a:r>
-          </a:p>
-        </p:txBody>
-      </p:sp>
-      <p:sp>
-        <p:nvSpPr>
-          <p:cNvPr id="4" name="Slide Number Placeholder 3"/>
-          <p:cNvSpPr>
-            <a:spLocks xmlns:a="http://schemas.openxmlformats.org/drawingml/2006/main" noGrp="1"/>
-          </p:cNvSpPr>
-          <p:nvPr>
-            <p:ph type="sldNum" idx="5"/>
-          </p:nvPr>
-        </p:nvSpPr>
-        <p:spPr/>
-        <p:txBody>
-          <a:bodyPr xmlns:a="http://schemas.openxmlformats.org/drawingml/2006/main"/>
-          <a:lstStyle xmlns:a="http://schemas.openxmlformats.org/drawingml/2006/main"/>
-          <a:p xmlns:a="http://schemas.openxmlformats.org/drawingml/2006/main"/>
-        </p:txBody>
-      </p:sp>
-    </p:spTree>
-  </p:cSld>
-  <p:clrMapOvr>
-    <a:masterClrMapping xmlns:a="http://schemas.openxmlformats.org/drawingml/2006/main"/>
-  </p:clrMapOvr>
-</p:notes>
-</file>
-
-<file path=ppt/notesSlides/notesSlide27.xml><?xml version="1.0" encoding="utf-8"?>
-<p:notes xmlns:p="http://schemas.openxmlformats.org/presentationml/2006/main">
-  <p:cSld>
-    <p:spTree>
-      <p:nvGrpSpPr>
-        <p:cNvPr id="1" name=""/>
-        <p:cNvGrpSpPr/>
-        <p:nvPr/>
-      </p:nvGrpSpPr>
-      <p:grpSpPr>
-        <a:xfrm xmlns:a="http://schemas.openxmlformats.org/drawingml/2006/main"/>
-      </p:grpSpPr>
-      <p:sp>
-        <p:nvSpPr>
-          <p:cNvPr id="2" name="Slide Image Placeholder 1"/>
-          <p:cNvSpPr>
-            <a:spLocks xmlns:a="http://schemas.openxmlformats.org/drawingml/2006/main" noGrp="1"/>
-          </p:cNvSpPr>
-          <p:nvPr>
-            <p:ph type="sldImg" idx="0"/>
-          </p:nvPr>
-        </p:nvSpPr>
-        <p:spPr/>
-      </p:sp>
-      <p:sp>
-        <p:nvSpPr>
-          <p:cNvPr id="3" name="Notes Placeholder 2"/>
-          <p:cNvSpPr>
-            <a:spLocks xmlns:a="http://schemas.openxmlformats.org/drawingml/2006/main" noGrp="1"/>
-          </p:cNvSpPr>
-          <p:nvPr>
-            <p:ph type="body" idx="1"/>
-          </p:nvPr>
-        </p:nvSpPr>
-        <p:spPr/>
-        <p:txBody>
-          <a:bodyPr xmlns:a="http://schemas.openxmlformats.org/drawingml/2006/main"/>
-          <a:lstStyle xmlns:a="http://schemas.openxmlformats.org/drawingml/2006/main"/>
-          <a:p xmlns:a="http://schemas.openxmlformats.org/drawingml/2006/main">
-            <a:r>
-              <a:t>這頁對應 session6.md Matrix。</a:t>
-            </a:r>
-          </a:p>
-        </p:txBody>
-      </p:sp>
-      <p:sp>
-        <p:nvSpPr>
-          <p:cNvPr id="4" name="Slide Number Placeholder 3"/>
-          <p:cNvSpPr>
-            <a:spLocks xmlns:a="http://schemas.openxmlformats.org/drawingml/2006/main" noGrp="1"/>
-          </p:cNvSpPr>
-          <p:nvPr>
-            <p:ph type="sldNum" idx="5"/>
-          </p:nvPr>
-        </p:nvSpPr>
-        <p:spPr/>
-        <p:txBody>
-          <a:bodyPr xmlns:a="http://schemas.openxmlformats.org/drawingml/2006/main"/>
-          <a:lstStyle xmlns:a="http://schemas.openxmlformats.org/drawingml/2006/main"/>
-          <a:p xmlns:a="http://schemas.openxmlformats.org/drawingml/2006/main"/>
-        </p:txBody>
-      </p:sp>
-    </p:spTree>
-  </p:cSld>
-  <p:clrMapOvr>
-    <a:masterClrMapping xmlns:a="http://schemas.openxmlformats.org/drawingml/2006/main"/>
-  </p:clrMapOvr>
-</p:notes>
-</file>
-
-<file path=ppt/notesSlides/notesSlide28.xml><?xml version="1.0" encoding="utf-8"?>
-<p:notes xmlns:p="http://schemas.openxmlformats.org/presentationml/2006/main">
-  <p:cSld>
-    <p:spTree>
-      <p:nvGrpSpPr>
-        <p:cNvPr id="1" name=""/>
-        <p:cNvGrpSpPr/>
-        <p:nvPr/>
-      </p:nvGrpSpPr>
-      <p:grpSpPr>
-        <a:xfrm xmlns:a="http://schemas.openxmlformats.org/drawingml/2006/main"/>
-      </p:grpSpPr>
-      <p:sp>
-        <p:nvSpPr>
-          <p:cNvPr id="2" name="Slide Image Placeholder 1"/>
-          <p:cNvSpPr>
-            <a:spLocks xmlns:a="http://schemas.openxmlformats.org/drawingml/2006/main" noGrp="1"/>
-          </p:cNvSpPr>
-          <p:nvPr>
-            <p:ph type="sldImg" idx="0"/>
-          </p:nvPr>
-        </p:nvSpPr>
-        <p:spPr/>
-      </p:sp>
-      <p:sp>
-        <p:nvSpPr>
-          <p:cNvPr id="3" name="Notes Placeholder 2"/>
-          <p:cNvSpPr>
-            <a:spLocks xmlns:a="http://schemas.openxmlformats.org/drawingml/2006/main" noGrp="1"/>
-          </p:cNvSpPr>
-          <p:nvPr>
-            <p:ph type="body" idx="1"/>
-          </p:nvPr>
-        </p:nvSpPr>
-        <p:spPr/>
-        <p:txBody>
-          <a:bodyPr xmlns:a="http://schemas.openxmlformats.org/drawingml/2006/main"/>
-          <a:lstStyle xmlns:a="http://schemas.openxmlformats.org/drawingml/2006/main"/>
-          <a:p xmlns:a="http://schemas.openxmlformats.org/drawingml/2006/main">
-            <a:r>
-              <a:t>練習題來自 exercises.md 第 6 堂概念題 Q3。</a:t>
-            </a:r>
-          </a:p>
-        </p:txBody>
-      </p:sp>
-      <p:sp>
-        <p:nvSpPr>
-          <p:cNvPr id="4" name="Slide Number Placeholder 3"/>
-          <p:cNvSpPr>
-            <a:spLocks xmlns:a="http://schemas.openxmlformats.org/drawingml/2006/main" noGrp="1"/>
-          </p:cNvSpPr>
-          <p:nvPr>
-            <p:ph type="sldNum" idx="5"/>
-          </p:nvPr>
-        </p:nvSpPr>
-        <p:spPr/>
-        <p:txBody>
-          <a:bodyPr xmlns:a="http://schemas.openxmlformats.org/drawingml/2006/main"/>
-          <a:lstStyle xmlns:a="http://schemas.openxmlformats.org/drawingml/2006/main"/>
-          <a:p xmlns:a="http://schemas.openxmlformats.org/drawingml/2006/main"/>
-        </p:txBody>
-      </p:sp>
-    </p:spTree>
-  </p:cSld>
-  <p:clrMapOvr>
-    <a:masterClrMapping xmlns:a="http://schemas.openxmlformats.org/drawingml/2006/main"/>
-  </p:clrMapOvr>
-</p:notes>
-</file>
-
-<file path=ppt/notesSlides/notesSlide29.xml><?xml version="1.0" encoding="utf-8"?>
-<p:notes xmlns:p="http://schemas.openxmlformats.org/presentationml/2006/main">
-  <p:cSld>
-    <p:spTree>
-      <p:nvGrpSpPr>
-        <p:cNvPr id="1" name=""/>
-        <p:cNvGrpSpPr/>
-        <p:nvPr/>
-      </p:nvGrpSpPr>
-      <p:grpSpPr>
-        <a:xfrm xmlns:a="http://schemas.openxmlformats.org/drawingml/2006/main"/>
-      </p:grpSpPr>
-      <p:sp>
-        <p:nvSpPr>
-          <p:cNvPr id="2" name="Slide Image Placeholder 1"/>
-          <p:cNvSpPr>
-            <a:spLocks xmlns:a="http://schemas.openxmlformats.org/drawingml/2006/main" noGrp="1"/>
-          </p:cNvSpPr>
-          <p:nvPr>
-            <p:ph type="sldImg" idx="0"/>
-          </p:nvPr>
-        </p:nvSpPr>
-        <p:spPr/>
-      </p:sp>
-      <p:sp>
-        <p:nvSpPr>
-          <p:cNvPr id="3" name="Notes Placeholder 2"/>
-          <p:cNvSpPr>
-            <a:spLocks xmlns:a="http://schemas.openxmlformats.org/drawingml/2006/main" noGrp="1"/>
-          </p:cNvSpPr>
-          <p:nvPr>
-            <p:ph type="body" idx="1"/>
-          </p:nvPr>
-        </p:nvSpPr>
-        <p:spPr/>
-        <p:txBody>
-          <a:bodyPr xmlns:a="http://schemas.openxmlformats.org/drawingml/2006/main"/>
-          <a:lstStyle xmlns:a="http://schemas.openxmlformats.org/drawingml/2006/main"/>
-          <a:p xmlns:a="http://schemas.openxmlformats.org/drawingml/2006/main">
-            <a:r>
-              <a:t>這頁對應 session6.md 六堂課回顧。</a:t>
-            </a:r>
-          </a:p>
-        </p:txBody>
-      </p:sp>
-      <p:sp>
-        <p:nvSpPr>
-          <p:cNvPr id="4" name="Slide Number Placeholder 3"/>
-          <p:cNvSpPr>
-            <a:spLocks xmlns:a="http://schemas.openxmlformats.org/drawingml/2006/main" noGrp="1"/>
-          </p:cNvSpPr>
-          <p:nvPr>
-            <p:ph type="sldNum" idx="5"/>
-          </p:nvPr>
-        </p:nvSpPr>
-        <p:spPr/>
-        <p:txBody>
-          <a:bodyPr xmlns:a="http://schemas.openxmlformats.org/drawingml/2006/main"/>
-          <a:lstStyle xmlns:a="http://schemas.openxmlformats.org/drawingml/2006/main"/>
-          <a:p xmlns:a="http://schemas.openxmlformats.org/drawingml/2006/main"/>
-        </p:txBody>
-      </p:sp>
-    </p:spTree>
-  </p:cSld>
-  <p:clrMapOvr>
-    <a:masterClrMapping xmlns:a="http://schemas.openxmlformats.org/drawingml/2006/main"/>
-  </p:clrMapOvr>
-</p:notes>
-</file>
-
-<file path=ppt/notesSlides/notesSlide3.xml><?xml version="1.0" encoding="utf-8"?>
-<p:notes xmlns:p="http://schemas.openxmlformats.org/presentationml/2006/main">
-  <p:cSld>
-    <p:spTree>
-      <p:nvGrpSpPr>
-        <p:cNvPr id="1" name=""/>
-        <p:cNvGrpSpPr/>
-        <p:nvPr/>
-      </p:nvGrpSpPr>
-      <p:grpSpPr>
-        <a:xfrm xmlns:a="http://schemas.openxmlformats.org/drawingml/2006/main"/>
-      </p:grpSpPr>
-      <p:sp>
-        <p:nvSpPr>
-          <p:cNvPr id="2" name="Slide Image Placeholder 1"/>
-          <p:cNvSpPr>
-            <a:spLocks xmlns:a="http://schemas.openxmlformats.org/drawingml/2006/main" noGrp="1"/>
-          </p:cNvSpPr>
-          <p:nvPr>
-            <p:ph type="sldImg" idx="0"/>
-          </p:nvPr>
-        </p:nvSpPr>
-        <p:spPr/>
-      </p:sp>
-      <p:sp>
-        <p:nvSpPr>
-          <p:cNvPr id="3" name="Notes Placeholder 2"/>
-          <p:cNvSpPr>
-            <a:spLocks xmlns:a="http://schemas.openxmlformats.org/drawingml/2006/main" noGrp="1"/>
-          </p:cNvSpPr>
-          <p:nvPr>
-            <p:ph type="body" idx="1"/>
-          </p:nvPr>
-        </p:nvSpPr>
-        <p:spPr/>
-        <p:txBody>
-          <a:bodyPr xmlns:a="http://schemas.openxmlformats.org/drawingml/2006/main"/>
-          <a:lstStyle xmlns:a="http://schemas.openxmlformats.org/drawingml/2006/main"/>
-          <a:p xmlns:a="http://schemas.openxmlformats.org/drawingml/2006/main">
-            <a:r>
-              <a:t>先給總覽，接下來四個概念逐一拆開。</a:t>
-            </a:r>
-          </a:p>
-        </p:txBody>
-      </p:sp>
-      <p:sp>
-        <p:nvSpPr>
-          <p:cNvPr id="4" name="Slide Number Placeholder 3"/>
-          <p:cNvSpPr>
-            <a:spLocks xmlns:a="http://schemas.openxmlformats.org/drawingml/2006/main" noGrp="1"/>
-          </p:cNvSpPr>
-          <p:nvPr>
-            <p:ph type="sldNum" idx="5"/>
-          </p:nvPr>
-        </p:nvSpPr>
-        <p:spPr/>
-        <p:txBody>
-          <a:bodyPr xmlns:a="http://schemas.openxmlformats.org/drawingml/2006/main"/>
-          <a:lstStyle xmlns:a="http://schemas.openxmlformats.org/drawingml/2006/main"/>
-          <a:p xmlns:a="http://schemas.openxmlformats.org/drawingml/2006/main"/>
-        </p:txBody>
-      </p:sp>
-    </p:spTree>
-  </p:cSld>
-  <p:clrMapOvr>
-    <a:masterClrMapping xmlns:a="http://schemas.openxmlformats.org/drawingml/2006/main"/>
-  </p:clrMapOvr>
-</p:notes>
-</file>
-
-<file path=ppt/notesSlides/notesSlide30.xml><?xml version="1.0" encoding="utf-8"?>
-<p:notes xmlns:p="http://schemas.openxmlformats.org/presentationml/2006/main">
-  <p:cSld>
-    <p:spTree>
-      <p:nvGrpSpPr>
-        <p:cNvPr id="1" name=""/>
-        <p:cNvGrpSpPr/>
-        <p:nvPr/>
-      </p:nvGrpSpPr>
-      <p:grpSpPr>
-        <a:xfrm xmlns:a="http://schemas.openxmlformats.org/drawingml/2006/main"/>
-      </p:grpSpPr>
-      <p:sp>
-        <p:nvSpPr>
-          <p:cNvPr id="2" name="Slide Image Placeholder 1"/>
-          <p:cNvSpPr>
-            <a:spLocks xmlns:a="http://schemas.openxmlformats.org/drawingml/2006/main" noGrp="1"/>
-          </p:cNvSpPr>
-          <p:nvPr>
-            <p:ph type="sldImg" idx="0"/>
-          </p:nvPr>
-        </p:nvSpPr>
-        <p:spPr/>
-      </p:sp>
-      <p:sp>
-        <p:nvSpPr>
-          <p:cNvPr id="3" name="Notes Placeholder 2"/>
-          <p:cNvSpPr>
-            <a:spLocks xmlns:a="http://schemas.openxmlformats.org/drawingml/2006/main" noGrp="1"/>
-          </p:cNvSpPr>
-          <p:nvPr>
-            <p:ph type="body" idx="1"/>
-          </p:nvPr>
-        </p:nvSpPr>
-        <p:spPr/>
-        <p:txBody>
-          <a:bodyPr xmlns:a="http://schemas.openxmlformats.org/drawingml/2006/main"/>
-          <a:lstStyle xmlns:a="http://schemas.openxmlformats.org/drawingml/2006/main"/>
-          <a:p xmlns:a="http://schemas.openxmlformats.org/drawingml/2006/main">
-            <a:r>
-              <a:t>完整流程收束六堂課。</a:t>
-            </a:r>
-          </a:p>
-        </p:txBody>
-      </p:sp>
-      <p:sp>
-        <p:nvSpPr>
-          <p:cNvPr id="4" name="Slide Number Placeholder 3"/>
-          <p:cNvSpPr>
-            <a:spLocks xmlns:a="http://schemas.openxmlformats.org/drawingml/2006/main" noGrp="1"/>
-          </p:cNvSpPr>
-          <p:nvPr>
-            <p:ph type="sldNum" idx="5"/>
-          </p:nvPr>
-        </p:nvSpPr>
-        <p:spPr/>
-        <p:txBody>
-          <a:bodyPr xmlns:a="http://schemas.openxmlformats.org/drawingml/2006/main"/>
-          <a:lstStyle xmlns:a="http://schemas.openxmlformats.org/drawingml/2006/main"/>
-          <a:p xmlns:a="http://schemas.openxmlformats.org/drawingml/2006/main"/>
-        </p:txBody>
-      </p:sp>
-    </p:spTree>
-  </p:cSld>
-  <p:clrMapOvr>
-    <a:masterClrMapping xmlns:a="http://schemas.openxmlformats.org/drawingml/2006/main"/>
-  </p:clrMapOvr>
-</p:notes>
-</file>
-
-<file path=ppt/notesSlides/notesSlide31.xml><?xml version="1.0" encoding="utf-8"?>
-<p:notes xmlns:p="http://schemas.openxmlformats.org/presentationml/2006/main">
-  <p:cSld>
-    <p:spTree>
-      <p:nvGrpSpPr>
-        <p:cNvPr id="1" name=""/>
-        <p:cNvGrpSpPr/>
-        <p:nvPr/>
-      </p:nvGrpSpPr>
-      <p:grpSpPr>
-        <a:xfrm xmlns:a="http://schemas.openxmlformats.org/drawingml/2006/main"/>
-      </p:grpSpPr>
-      <p:sp>
-        <p:nvSpPr>
-          <p:cNvPr id="2" name="Slide Image Placeholder 1"/>
-          <p:cNvSpPr>
-            <a:spLocks xmlns:a="http://schemas.openxmlformats.org/drawingml/2006/main" noGrp="1"/>
-          </p:cNvSpPr>
-          <p:nvPr>
-            <p:ph type="sldImg" idx="0"/>
-          </p:nvPr>
-        </p:nvSpPr>
-        <p:spPr/>
-      </p:sp>
-      <p:sp>
-        <p:nvSpPr>
-          <p:cNvPr id="3" name="Notes Placeholder 2"/>
-          <p:cNvSpPr>
-            <a:spLocks xmlns:a="http://schemas.openxmlformats.org/drawingml/2006/main" noGrp="1"/>
-          </p:cNvSpPr>
-          <p:nvPr>
-            <p:ph type="body" idx="1"/>
-          </p:nvPr>
-        </p:nvSpPr>
-        <p:spPr/>
-        <p:txBody>
-          <a:bodyPr xmlns:a="http://schemas.openxmlformats.org/drawingml/2006/main"/>
-          <a:lstStyle xmlns:a="http://schemas.openxmlformats.org/drawingml/2006/main"/>
-          <a:p xmlns:a="http://schemas.openxmlformats.org/drawingml/2006/main">
-            <a:r>
-              <a:t>練習題來自 exercises.md 第 6 堂挑戰題 C1-C2。</a:t>
-            </a:r>
-          </a:p>
-        </p:txBody>
-      </p:sp>
-      <p:sp>
-        <p:nvSpPr>
-          <p:cNvPr id="4" name="Slide Number Placeholder 3"/>
-          <p:cNvSpPr>
-            <a:spLocks xmlns:a="http://schemas.openxmlformats.org/drawingml/2006/main" noGrp="1"/>
-          </p:cNvSpPr>
-          <p:nvPr>
-            <p:ph type="sldNum" idx="5"/>
-          </p:nvPr>
-        </p:nvSpPr>
-        <p:spPr/>
-        <p:txBody>
-          <a:bodyPr xmlns:a="http://schemas.openxmlformats.org/drawingml/2006/main"/>
-          <a:lstStyle xmlns:a="http://schemas.openxmlformats.org/drawingml/2006/main"/>
-          <a:p xmlns:a="http://schemas.openxmlformats.org/drawingml/2006/main"/>
-        </p:txBody>
-      </p:sp>
-    </p:spTree>
-  </p:cSld>
-  <p:clrMapOvr>
-    <a:masterClrMapping xmlns:a="http://schemas.openxmlformats.org/drawingml/2006/main"/>
-  </p:clrMapOvr>
-</p:notes>
-</file>
-
-<file path=ppt/notesSlides/notesSlide32.xml><?xml version="1.0" encoding="utf-8"?>
-<p:notes xmlns:p="http://schemas.openxmlformats.org/presentationml/2006/main">
-  <p:cSld>
-    <p:spTree>
-      <p:nvGrpSpPr>
-        <p:cNvPr id="1" name=""/>
-        <p:cNvGrpSpPr/>
-        <p:nvPr/>
-      </p:nvGrpSpPr>
-      <p:grpSpPr>
-        <a:xfrm xmlns:a="http://schemas.openxmlformats.org/drawingml/2006/main"/>
-      </p:grpSpPr>
-      <p:sp>
-        <p:nvSpPr>
-          <p:cNvPr id="2" name="Slide Image Placeholder 1"/>
-          <p:cNvSpPr>
-            <a:spLocks xmlns:a="http://schemas.openxmlformats.org/drawingml/2006/main" noGrp="1"/>
-          </p:cNvSpPr>
-          <p:nvPr>
-            <p:ph type="sldImg" idx="0"/>
-          </p:nvPr>
-        </p:nvSpPr>
-        <p:spPr/>
-      </p:sp>
-      <p:sp>
-        <p:nvSpPr>
-          <p:cNvPr id="3" name="Notes Placeholder 2"/>
-          <p:cNvSpPr>
-            <a:spLocks xmlns:a="http://schemas.openxmlformats.org/drawingml/2006/main" noGrp="1"/>
-          </p:cNvSpPr>
-          <p:nvPr>
-            <p:ph type="body" idx="1"/>
-          </p:nvPr>
-        </p:nvSpPr>
-        <p:spPr/>
-        <p:txBody>
-          <a:bodyPr xmlns:a="http://schemas.openxmlformats.org/drawingml/2006/main"/>
-          <a:lstStyle xmlns:a="http://schemas.openxmlformats.org/drawingml/2006/main"/>
-          <a:p xmlns:a="http://schemas.openxmlformats.org/drawingml/2006/main">
-            <a:r>
-              <a:t>最後一頁用未來方向收尾。</a:t>
-            </a:r>
-          </a:p>
-        </p:txBody>
-      </p:sp>
-      <p:sp>
-        <p:nvSpPr>
-          <p:cNvPr id="4" name="Slide Number Placeholder 3"/>
-          <p:cNvSpPr>
-            <a:spLocks xmlns:a="http://schemas.openxmlformats.org/drawingml/2006/main" noGrp="1"/>
-          </p:cNvSpPr>
-          <p:nvPr>
-            <p:ph type="sldNum" idx="5"/>
-          </p:nvPr>
-        </p:nvSpPr>
-        <p:spPr/>
-        <p:txBody>
-          <a:bodyPr xmlns:a="http://schemas.openxmlformats.org/drawingml/2006/main"/>
-          <a:lstStyle xmlns:a="http://schemas.openxmlformats.org/drawingml/2006/main"/>
-          <a:p xmlns:a="http://schemas.openxmlformats.org/drawingml/2006/main"/>
-        </p:txBody>
-      </p:sp>
-    </p:spTree>
-  </p:cSld>
-  <p:clrMapOvr>
-    <a:masterClrMapping xmlns:a="http://schemas.openxmlformats.org/drawingml/2006/main"/>
-  </p:clrMapOvr>
-</p:notes>
-</file>
-
-<file path=ppt/notesSlides/notesSlide4.xml><?xml version="1.0" encoding="utf-8"?>
-<p:notes xmlns:p="http://schemas.openxmlformats.org/presentationml/2006/main">
-  <p:cSld>
-    <p:spTree>
-      <p:nvGrpSpPr>
-        <p:cNvPr id="1" name=""/>
-        <p:cNvGrpSpPr/>
-        <p:nvPr/>
-      </p:nvGrpSpPr>
-      <p:grpSpPr>
-        <a:xfrm xmlns:a="http://schemas.openxmlformats.org/drawingml/2006/main"/>
-      </p:grpSpPr>
-      <p:sp>
-        <p:nvSpPr>
-          <p:cNvPr id="2" name="Slide Image Placeholder 1"/>
-          <p:cNvSpPr>
-            <a:spLocks xmlns:a="http://schemas.openxmlformats.org/drawingml/2006/main" noGrp="1"/>
-          </p:cNvSpPr>
-          <p:nvPr>
-            <p:ph type="sldImg" idx="0"/>
-          </p:nvPr>
-        </p:nvSpPr>
-        <p:spPr/>
-      </p:sp>
-      <p:sp>
-        <p:nvSpPr>
-          <p:cNvPr id="3" name="Notes Placeholder 2"/>
-          <p:cNvSpPr>
-            <a:spLocks xmlns:a="http://schemas.openxmlformats.org/drawingml/2006/main" noGrp="1"/>
-          </p:cNvSpPr>
-          <p:nvPr>
-            <p:ph type="body" idx="1"/>
-          </p:nvPr>
-        </p:nvSpPr>
-        <p:spPr/>
-        <p:txBody>
-          <a:bodyPr xmlns:a="http://schemas.openxmlformats.org/drawingml/2006/main"/>
-          <a:lstStyle xmlns:a="http://schemas.openxmlformats.org/drawingml/2006/main"/>
-          <a:p xmlns:a="http://schemas.openxmlformats.org/drawingml/2006/main">
-            <a:r>
-              <a:t>這頁對應 session6.md 環境變數段落。</a:t>
-            </a:r>
-          </a:p>
-        </p:txBody>
-      </p:sp>
-      <p:sp>
-        <p:nvSpPr>
-          <p:cNvPr id="4" name="Slide Number Placeholder 3"/>
-          <p:cNvSpPr>
-            <a:spLocks xmlns:a="http://schemas.openxmlformats.org/drawingml/2006/main" noGrp="1"/>
-          </p:cNvSpPr>
-          <p:nvPr>
-            <p:ph type="sldNum" idx="5"/>
-          </p:nvPr>
-        </p:nvSpPr>
-        <p:spPr/>
-        <p:txBody>
-          <a:bodyPr xmlns:a="http://schemas.openxmlformats.org/drawingml/2006/main"/>
-          <a:lstStyle xmlns:a="http://schemas.openxmlformats.org/drawingml/2006/main"/>
-          <a:p xmlns:a="http://schemas.openxmlformats.org/drawingml/2006/main"/>
-        </p:txBody>
-      </p:sp>
-    </p:spTree>
-  </p:cSld>
-  <p:clrMapOvr>
-    <a:masterClrMapping xmlns:a="http://schemas.openxmlformats.org/drawingml/2006/main"/>
-  </p:clrMapOvr>
-</p:notes>
-</file>
-
-<file path=ppt/notesSlides/notesSlide5.xml><?xml version="1.0" encoding="utf-8"?>
-<p:notes xmlns:p="http://schemas.openxmlformats.org/presentationml/2006/main">
-  <p:cSld>
-    <p:spTree>
-      <p:nvGrpSpPr>
-        <p:cNvPr id="1" name=""/>
-        <p:cNvGrpSpPr/>
-        <p:nvPr/>
-      </p:nvGrpSpPr>
-      <p:grpSpPr>
-        <a:xfrm xmlns:a="http://schemas.openxmlformats.org/drawingml/2006/main"/>
-      </p:grpSpPr>
-      <p:sp>
-        <p:nvSpPr>
-          <p:cNvPr id="2" name="Slide Image Placeholder 1"/>
-          <p:cNvSpPr>
-            <a:spLocks xmlns:a="http://schemas.openxmlformats.org/drawingml/2006/main" noGrp="1"/>
-          </p:cNvSpPr>
-          <p:nvPr>
-            <p:ph type="sldImg" idx="0"/>
-          </p:nvPr>
-        </p:nvSpPr>
-        <p:spPr/>
-      </p:sp>
-      <p:sp>
-        <p:nvSpPr>
-          <p:cNvPr id="3" name="Notes Placeholder 2"/>
-          <p:cNvSpPr>
-            <a:spLocks xmlns:a="http://schemas.openxmlformats.org/drawingml/2006/main" noGrp="1"/>
-          </p:cNvSpPr>
-          <p:nvPr>
-            <p:ph type="body" idx="1"/>
-          </p:nvPr>
-        </p:nvSpPr>
-        <p:spPr/>
-        <p:txBody>
-          <a:bodyPr xmlns:a="http://schemas.openxmlformats.org/drawingml/2006/main"/>
-          <a:lstStyle xmlns:a="http://schemas.openxmlformats.org/drawingml/2006/main"/>
-          <a:p xmlns:a="http://schemas.openxmlformats.org/drawingml/2006/main">
-            <a:r>
-              <a:t>練習題來自 exercises.md 第 6 堂概念題 Q2。</a:t>
-            </a:r>
-          </a:p>
-        </p:txBody>
-      </p:sp>
-      <p:sp>
-        <p:nvSpPr>
-          <p:cNvPr id="4" name="Slide Number Placeholder 3"/>
-          <p:cNvSpPr>
-            <a:spLocks xmlns:a="http://schemas.openxmlformats.org/drawingml/2006/main" noGrp="1"/>
-          </p:cNvSpPr>
-          <p:nvPr>
-            <p:ph type="sldNum" idx="5"/>
-          </p:nvPr>
-        </p:nvSpPr>
-        <p:spPr/>
-        <p:txBody>
-          <a:bodyPr xmlns:a="http://schemas.openxmlformats.org/drawingml/2006/main"/>
-          <a:lstStyle xmlns:a="http://schemas.openxmlformats.org/drawingml/2006/main"/>
-          <a:p xmlns:a="http://schemas.openxmlformats.org/drawingml/2006/main"/>
-        </p:txBody>
-      </p:sp>
-    </p:spTree>
-  </p:cSld>
-  <p:clrMapOvr>
-    <a:masterClrMapping xmlns:a="http://schemas.openxmlformats.org/drawingml/2006/main"/>
-  </p:clrMapOvr>
-</p:notes>
-</file>
-
-<file path=ppt/notesSlides/notesSlide6.xml><?xml version="1.0" encoding="utf-8"?>
-<p:notes xmlns:p="http://schemas.openxmlformats.org/presentationml/2006/main">
-  <p:cSld>
-    <p:spTree>
-      <p:nvGrpSpPr>
-        <p:cNvPr id="1" name=""/>
-        <p:cNvGrpSpPr/>
-        <p:nvPr/>
-      </p:nvGrpSpPr>
-      <p:grpSpPr>
-        <a:xfrm xmlns:a="http://schemas.openxmlformats.org/drawingml/2006/main"/>
-      </p:grpSpPr>
-      <p:sp>
-        <p:nvSpPr>
-          <p:cNvPr id="2" name="Slide Image Placeholder 1"/>
-          <p:cNvSpPr>
-            <a:spLocks xmlns:a="http://schemas.openxmlformats.org/drawingml/2006/main" noGrp="1"/>
-          </p:cNvSpPr>
-          <p:nvPr>
-            <p:ph type="sldImg" idx="0"/>
-          </p:nvPr>
-        </p:nvSpPr>
-        <p:spPr/>
-      </p:sp>
-      <p:sp>
-        <p:nvSpPr>
-          <p:cNvPr id="3" name="Notes Placeholder 2"/>
-          <p:cNvSpPr>
-            <a:spLocks xmlns:a="http://schemas.openxmlformats.org/drawingml/2006/main" noGrp="1"/>
-          </p:cNvSpPr>
-          <p:nvPr>
-            <p:ph type="body" idx="1"/>
-          </p:nvPr>
-        </p:nvSpPr>
-        <p:spPr/>
-        <p:txBody>
-          <a:bodyPr xmlns:a="http://schemas.openxmlformats.org/drawingml/2006/main"/>
-          <a:lstStyle xmlns:a="http://schemas.openxmlformats.org/drawingml/2006/main"/>
-          <a:p xmlns:a="http://schemas.openxmlformats.org/drawingml/2006/main">
-            <a:r>
-              <a:t>if 是避免每個事件都做同樣事的關鍵。</a:t>
-            </a:r>
-          </a:p>
-        </p:txBody>
-      </p:sp>
-      <p:sp>
-        <p:nvSpPr>
-          <p:cNvPr id="4" name="Slide Number Placeholder 3"/>
-          <p:cNvSpPr>
-            <a:spLocks xmlns:a="http://schemas.openxmlformats.org/drawingml/2006/main" noGrp="1"/>
-          </p:cNvSpPr>
-          <p:nvPr>
-            <p:ph type="sldNum" idx="5"/>
-          </p:nvPr>
-        </p:nvSpPr>
-        <p:spPr/>
-        <p:txBody>
-          <a:bodyPr xmlns:a="http://schemas.openxmlformats.org/drawingml/2006/main"/>
-          <a:lstStyle xmlns:a="http://schemas.openxmlformats.org/drawingml/2006/main"/>
-          <a:p xmlns:a="http://schemas.openxmlformats.org/drawingml/2006/main"/>
-        </p:txBody>
-      </p:sp>
-    </p:spTree>
-  </p:cSld>
-  <p:clrMapOvr>
-    <a:masterClrMapping xmlns:a="http://schemas.openxmlformats.org/drawingml/2006/main"/>
-  </p:clrMapOvr>
-</p:notes>
-</file>
-
-<file path=ppt/notesSlides/notesSlide7.xml><?xml version="1.0" encoding="utf-8"?>
-<p:notes xmlns:p="http://schemas.openxmlformats.org/presentationml/2006/main">
-  <p:cSld>
-    <p:spTree>
-      <p:nvGrpSpPr>
-        <p:cNvPr id="1" name=""/>
-        <p:cNvGrpSpPr/>
-        <p:nvPr/>
-      </p:nvGrpSpPr>
-      <p:grpSpPr>
-        <a:xfrm xmlns:a="http://schemas.openxmlformats.org/drawingml/2006/main"/>
-      </p:grpSpPr>
-      <p:sp>
-        <p:nvSpPr>
-          <p:cNvPr id="2" name="Slide Image Placeholder 1"/>
-          <p:cNvSpPr>
-            <a:spLocks xmlns:a="http://schemas.openxmlformats.org/drawingml/2006/main" noGrp="1"/>
-          </p:cNvSpPr>
-          <p:nvPr>
-            <p:ph type="sldImg" idx="0"/>
-          </p:nvPr>
-        </p:nvSpPr>
-        <p:spPr/>
-      </p:sp>
-      <p:sp>
-        <p:nvSpPr>
-          <p:cNvPr id="3" name="Notes Placeholder 2"/>
-          <p:cNvSpPr>
-            <a:spLocks xmlns:a="http://schemas.openxmlformats.org/drawingml/2006/main" noGrp="1"/>
-          </p:cNvSpPr>
-          <p:nvPr>
-            <p:ph type="body" idx="1"/>
-          </p:nvPr>
-        </p:nvSpPr>
-        <p:spPr/>
-        <p:txBody>
-          <a:bodyPr xmlns:a="http://schemas.openxmlformats.org/drawingml/2006/main"/>
-          <a:lstStyle xmlns:a="http://schemas.openxmlformats.org/drawingml/2006/main"/>
-          <a:p xmlns:a="http://schemas.openxmlformats.org/drawingml/2006/main">
-            <a:r>
-              <a:t>把 needs 用視覺化順序說清楚。</a:t>
-            </a:r>
-          </a:p>
-        </p:txBody>
-      </p:sp>
-      <p:sp>
-        <p:nvSpPr>
-          <p:cNvPr id="4" name="Slide Number Placeholder 3"/>
-          <p:cNvSpPr>
-            <a:spLocks xmlns:a="http://schemas.openxmlformats.org/drawingml/2006/main" noGrp="1"/>
-          </p:cNvSpPr>
-          <p:nvPr>
-            <p:ph type="sldNum" idx="5"/>
-          </p:nvPr>
-        </p:nvSpPr>
-        <p:spPr/>
-        <p:txBody>
-          <a:bodyPr xmlns:a="http://schemas.openxmlformats.org/drawingml/2006/main"/>
-          <a:lstStyle xmlns:a="http://schemas.openxmlformats.org/drawingml/2006/main"/>
-          <a:p xmlns:a="http://schemas.openxmlformats.org/drawingml/2006/main"/>
-        </p:txBody>
-      </p:sp>
-    </p:spTree>
-  </p:cSld>
-  <p:clrMapOvr>
-    <a:masterClrMapping xmlns:a="http://schemas.openxmlformats.org/drawingml/2006/main"/>
-  </p:clrMapOvr>
-</p:notes>
-</file>
-
-<file path=ppt/notesSlides/notesSlide8.xml><?xml version="1.0" encoding="utf-8"?>
-<p:notes xmlns:p="http://schemas.openxmlformats.org/presentationml/2006/main">
-  <p:cSld>
-    <p:spTree>
-      <p:nvGrpSpPr>
-        <p:cNvPr id="1" name=""/>
-        <p:cNvGrpSpPr/>
-        <p:nvPr/>
-      </p:nvGrpSpPr>
-      <p:grpSpPr>
-        <a:xfrm xmlns:a="http://schemas.openxmlformats.org/drawingml/2006/main"/>
-      </p:grpSpPr>
-      <p:sp>
-        <p:nvSpPr>
-          <p:cNvPr id="2" name="Slide Image Placeholder 1"/>
-          <p:cNvSpPr>
-            <a:spLocks xmlns:a="http://schemas.openxmlformats.org/drawingml/2006/main" noGrp="1"/>
-          </p:cNvSpPr>
-          <p:nvPr>
-            <p:ph type="sldImg" idx="0"/>
-          </p:nvPr>
-        </p:nvSpPr>
-        <p:spPr/>
-      </p:sp>
-      <p:sp>
-        <p:nvSpPr>
-          <p:cNvPr id="3" name="Notes Placeholder 2"/>
-          <p:cNvSpPr>
-            <a:spLocks xmlns:a="http://schemas.openxmlformats.org/drawingml/2006/main" noGrp="1"/>
-          </p:cNvSpPr>
-          <p:nvPr>
-            <p:ph type="body" idx="1"/>
-          </p:nvPr>
-        </p:nvSpPr>
-        <p:spPr/>
-        <p:txBody>
-          <a:bodyPr xmlns:a="http://schemas.openxmlformats.org/drawingml/2006/main"/>
-          <a:lstStyle xmlns:a="http://schemas.openxmlformats.org/drawingml/2006/main"/>
-          <a:p xmlns:a="http://schemas.openxmlformats.org/drawingml/2006/main">
-            <a:r>
-              <a:t>練習題來自 exercises.md 第 6 堂概念題 Q1。</a:t>
-            </a:r>
-          </a:p>
-        </p:txBody>
-      </p:sp>
-      <p:sp>
-        <p:nvSpPr>
-          <p:cNvPr id="4" name="Slide Number Placeholder 3"/>
-          <p:cNvSpPr>
-            <a:spLocks xmlns:a="http://schemas.openxmlformats.org/drawingml/2006/main" noGrp="1"/>
-          </p:cNvSpPr>
-          <p:nvPr>
-            <p:ph type="sldNum" idx="5"/>
-          </p:nvPr>
-        </p:nvSpPr>
-        <p:spPr/>
-        <p:txBody>
-          <a:bodyPr xmlns:a="http://schemas.openxmlformats.org/drawingml/2006/main"/>
-          <a:lstStyle xmlns:a="http://schemas.openxmlformats.org/drawingml/2006/main"/>
-          <a:p xmlns:a="http://schemas.openxmlformats.org/drawingml/2006/main"/>
-        </p:txBody>
-      </p:sp>
-    </p:spTree>
-  </p:cSld>
-  <p:clrMapOvr>
-    <a:masterClrMapping xmlns:a="http://schemas.openxmlformats.org/drawingml/2006/main"/>
-  </p:clrMapOvr>
-</p:notes>
-</file>
-
-<file path=ppt/notesSlides/notesSlide9.xml><?xml version="1.0" encoding="utf-8"?>
-<p:notes xmlns:p="http://schemas.openxmlformats.org/presentationml/2006/main">
-  <p:cSld>
-    <p:spTree>
-      <p:nvGrpSpPr>
-        <p:cNvPr id="1" name=""/>
-        <p:cNvGrpSpPr/>
-        <p:nvPr/>
-      </p:nvGrpSpPr>
-      <p:grpSpPr>
-        <a:xfrm xmlns:a="http://schemas.openxmlformats.org/drawingml/2006/main"/>
-      </p:grpSpPr>
-      <p:sp>
-        <p:nvSpPr>
-          <p:cNvPr id="2" name="Slide Image Placeholder 1"/>
-          <p:cNvSpPr>
-            <a:spLocks xmlns:a="http://schemas.openxmlformats.org/drawingml/2006/main" noGrp="1"/>
-          </p:cNvSpPr>
-          <p:nvPr>
-            <p:ph type="sldImg" idx="0"/>
-          </p:nvPr>
-        </p:nvSpPr>
-        <p:spPr/>
-      </p:sp>
-      <p:sp>
-        <p:nvSpPr>
-          <p:cNvPr id="3" name="Notes Placeholder 2"/>
-          <p:cNvSpPr>
-            <a:spLocks xmlns:a="http://schemas.openxmlformats.org/drawingml/2006/main" noGrp="1"/>
-          </p:cNvSpPr>
-          <p:nvPr>
-            <p:ph type="body" idx="1"/>
-          </p:nvPr>
-        </p:nvSpPr>
-        <p:spPr/>
-        <p:txBody>
-          <a:bodyPr xmlns:a="http://schemas.openxmlformats.org/drawingml/2006/main"/>
-          <a:lstStyle xmlns:a="http://schemas.openxmlformats.org/drawingml/2006/main"/>
-          <a:p xmlns:a="http://schemas.openxmlformats.org/drawingml/2006/main">
-            <a:r>
-              <a:t>這頁對應 session6.md 手動觸發 workflow。</a:t>
-            </a:r>
-          </a:p>
-        </p:txBody>
-      </p:sp>
-      <p:sp>
-        <p:nvSpPr>
-          <p:cNvPr id="4" name="Slide Number Placeholder 3"/>
-          <p:cNvSpPr>
-            <a:spLocks xmlns:a="http://schemas.openxmlformats.org/drawingml/2006/main" noGrp="1"/>
-          </p:cNvSpPr>
-          <p:nvPr>
-            <p:ph type="sldNum" idx="5"/>
-          </p:nvPr>
-        </p:nvSpPr>
-        <p:spPr/>
-        <p:txBody>
-          <a:bodyPr xmlns:a="http://schemas.openxmlformats.org/drawingml/2006/main"/>
-          <a:lstStyle xmlns:a="http://schemas.openxmlformats.org/drawingml/2006/main"/>
-          <a:p xmlns:a="http://schemas.openxmlformats.org/drawingml/2006/main"/>
-        </p:txBody>
-      </p:sp>
-    </p:spTree>
-  </p:cSld>
-  <p:clrMapOvr>
-    <a:masterClrMapping xmlns:a="http://schemas.openxmlformats.org/drawingml/2006/main"/>
-  </p:clrMapOvr>
-</p:notes>
-</file>
-
 <file path=ppt/slideLayouts/slideLayout1.xml><?xml version="1.0" encoding="utf-8"?>
 <p:sldLayout xmlns:p="http://schemas.openxmlformats.org/presentationml/2006/main" type="title">
   <p:cSld name="Title Slide">
@@ -2806,7 +176,7 @@
   </p:cSld>
   <p:clrMap bg1="lt1" tx1="dk1" bg2="lt2" tx2="dk2" accent1="accent1" accent2="accent2" accent3="accent3" accent4="accent4" accent5="accent5" accent6="accent6" hlink="hlink" folHlink="folHlink"/>
   <p:sldLayoutIdLst>
-    <p:sldLayoutId xmlns:r="http://schemas.openxmlformats.org/officeDocument/2006/relationships" id="2147483649" r:id="R2d0179e8b45343fc"/>
+    <p:sldLayoutId xmlns:r="http://schemas.openxmlformats.org/officeDocument/2006/relationships" id="2147483649" r:id="R9bb9cc29a1e34826"/>
   </p:sldLayoutIdLst>
   <p:txStyles>
     <p:titleStyle>
@@ -3396,14 +766,14 @@
       </p:sp>
       <p:pic>
         <p:nvPicPr>
-          <p:cNvPr id="12" name=""/>
+          <p:cNvPr id="13" name=""/>
           <p:cNvPicPr>
             <a:picLocks xmlns:a="http://schemas.openxmlformats.org/drawingml/2006/main" noChangeAspect="1"/>
           </p:cNvPicPr>
           <p:nvPr/>
         </p:nvPicPr>
         <p:blipFill>
-          <a:blip xmlns:r="http://schemas.openxmlformats.org/officeDocument/2006/relationships" xmlns:a="http://schemas.openxmlformats.org/drawingml/2006/main" r:embed="R102b7bb451b44b36"/>
+          <a:blip xmlns:r="http://schemas.openxmlformats.org/officeDocument/2006/relationships" xmlns:a="http://schemas.openxmlformats.org/drawingml/2006/main" r:embed="Rb0cfc332b876470d"/>
           <a:srcRect xmlns:a="http://schemas.openxmlformats.org/drawingml/2006/main" l="15216" t="0" r="15216" b="0"/>
           <a:stretch xmlns:a="http://schemas.openxmlformats.org/drawingml/2006/main">
             <a:fillRect l="0" t="0" r="0" b="0"/>
@@ -26310,14 +23680,14 @@
       </p:sp>
       <p:pic>
         <p:nvPicPr>
-          <p:cNvPr id="28" name=""/>
+          <p:cNvPr id="29" name=""/>
           <p:cNvPicPr>
             <a:picLocks xmlns:a="http://schemas.openxmlformats.org/drawingml/2006/main" noChangeAspect="1"/>
           </p:cNvPicPr>
           <p:nvPr/>
         </p:nvPicPr>
         <p:blipFill>
-          <a:blip xmlns:r="http://schemas.openxmlformats.org/officeDocument/2006/relationships" xmlns:a="http://schemas.openxmlformats.org/drawingml/2006/main" r:embed="Ra69b088fc2ab4bc4"/>
+          <a:blip xmlns:r="http://schemas.openxmlformats.org/officeDocument/2006/relationships" xmlns:a="http://schemas.openxmlformats.org/drawingml/2006/main" r:embed="R6dbd1229fee144f4"/>
           <a:srcRect xmlns:a="http://schemas.openxmlformats.org/drawingml/2006/main" l="5914" t="0" r="5914" b="0"/>
           <a:stretch xmlns:a="http://schemas.openxmlformats.org/drawingml/2006/main">
             <a:fillRect l="0" t="0" r="0" b="0"/>
@@ -26329,9 +23699,7 @@
             <a:ext cx="4476750" cy="2857500"/>
           </a:xfrm>
           <a:prstGeom xmlns:a="http://schemas.openxmlformats.org/drawingml/2006/main" prst="roundRect">
-            <a:avLst>
-              <a:gd name="adj" fmla="val 4667"/>
-            </a:avLst>
+            <a:avLst/>
           </a:prstGeom>
         </p:spPr>
       </p:pic>

--- a/slides/docker-session6-github-actions-advanced.pptx
+++ b/slides/docker-session6-github-actions-advanced.pptx
@@ -12,7 +12,10 @@
     <p:sldId xmlns:r="http://schemas.openxmlformats.org/officeDocument/2006/relationships" id="257" r:id="Ra0cdee1e9814491c"/>
     <p:sldId xmlns:r="http://schemas.openxmlformats.org/officeDocument/2006/relationships" id="258" r:id="R325d0377d57e428d"/>
     <p:sldId xmlns:r="http://schemas.openxmlformats.org/officeDocument/2006/relationships" id="259" r:id="R48fd4e3334724999"/>
+    <p:sldId id="300" r:id="rId1"/>
+    <p:sldId id="301" r:id="rId2"/>
     <p:sldId xmlns:r="http://schemas.openxmlformats.org/officeDocument/2006/relationships" id="260" r:id="Rcab1ebeb063b4c3b"/>
+    <p:sldId id="302" r:id="rId3"/>
     <p:sldId xmlns:r="http://schemas.openxmlformats.org/officeDocument/2006/relationships" id="261" r:id="R9fcd54827955408c"/>
     <p:sldId xmlns:r="http://schemas.openxmlformats.org/officeDocument/2006/relationships" id="262" r:id="Rdc80b6adfd7b4fd9"/>
     <p:sldId xmlns:r="http://schemas.openxmlformats.org/officeDocument/2006/relationships" id="263" r:id="Ra92290c42bb84522"/>
@@ -22,19 +25,37 @@
     <p:sldId xmlns:r="http://schemas.openxmlformats.org/officeDocument/2006/relationships" id="267" r:id="R2ac95e0720be4c32"/>
     <p:sldId xmlns:r="http://schemas.openxmlformats.org/officeDocument/2006/relationships" id="268" r:id="R9efa413ac06a438e"/>
     <p:sldId xmlns:r="http://schemas.openxmlformats.org/officeDocument/2006/relationships" id="269" r:id="R71bf09bbf842497a"/>
+    <p:sldId id="303" r:id="rId4"/>
+    <p:sldId id="304" r:id="rId5"/>
     <p:sldId xmlns:r="http://schemas.openxmlformats.org/officeDocument/2006/relationships" id="270" r:id="Rb0adbe4a7ea546b0"/>
+    <p:sldId id="305" r:id="rId6"/>
+    <p:sldId id="306" r:id="rId7"/>
     <p:sldId xmlns:r="http://schemas.openxmlformats.org/officeDocument/2006/relationships" id="271" r:id="R9254ce8970a545f7"/>
+    <p:sldId id="307" r:id="rId8"/>
+    <p:sldId id="308" r:id="rId9"/>
     <p:sldId xmlns:r="http://schemas.openxmlformats.org/officeDocument/2006/relationships" id="272" r:id="R4469aad3ca1b4ee4"/>
+    <p:sldId id="309" r:id="rId10"/>
     <p:sldId xmlns:r="http://schemas.openxmlformats.org/officeDocument/2006/relationships" id="273" r:id="Rfb831e38e8444138"/>
+    <p:sldId id="310" r:id="rId11"/>
+    <p:sldId id="311" r:id="rId12"/>
     <p:sldId xmlns:r="http://schemas.openxmlformats.org/officeDocument/2006/relationships" id="274" r:id="R8f0499d21b46496d"/>
     <p:sldId xmlns:r="http://schemas.openxmlformats.org/officeDocument/2006/relationships" id="275" r:id="R884ab836deb74d8c"/>
+    <p:sldId id="312" r:id="rId13"/>
+    <p:sldId id="313" r:id="rId14"/>
+    <p:sldId id="314" r:id="rId15"/>
     <p:sldId xmlns:r="http://schemas.openxmlformats.org/officeDocument/2006/relationships" id="276" r:id="Rb4f1f6f2799f4afe"/>
+    <p:sldId id="315" r:id="rId16"/>
     <p:sldId xmlns:r="http://schemas.openxmlformats.org/officeDocument/2006/relationships" id="277" r:id="R25a15ff4b6bb462a"/>
     <p:sldId xmlns:r="http://schemas.openxmlformats.org/officeDocument/2006/relationships" id="278" r:id="Rd44c264997564b0d"/>
     <p:sldId xmlns:r="http://schemas.openxmlformats.org/officeDocument/2006/relationships" id="279" r:id="Rb874a7ebea954634"/>
     <p:sldId xmlns:r="http://schemas.openxmlformats.org/officeDocument/2006/relationships" id="280" r:id="R26db982e10bb4d70"/>
     <p:sldId xmlns:r="http://schemas.openxmlformats.org/officeDocument/2006/relationships" id="281" r:id="Rffb5461ba1ab4dc5"/>
     <p:sldId xmlns:r="http://schemas.openxmlformats.org/officeDocument/2006/relationships" id="282" r:id="Rf9ff6c6c1e644844"/>
+    <p:sldId id="316" r:id="rId17"/>
+    <p:sldId id="317" r:id="rId18"/>
+    <p:sldId id="318" r:id="rId19"/>
+    <p:sldId id="319" r:id="rId20"/>
+    <p:sldId id="320" r:id="rId21"/>
     <p:sldId xmlns:r="http://schemas.openxmlformats.org/officeDocument/2006/relationships" id="283" r:id="Re62291301e4742a5"/>
     <p:sldId xmlns:r="http://schemas.openxmlformats.org/officeDocument/2006/relationships" id="284" r:id="R0544bc884805401e"/>
     <p:sldId xmlns:r="http://schemas.openxmlformats.org/officeDocument/2006/relationships" id="285" r:id="R21249b4c13ce44de"/>
@@ -46,35 +67,14 @@
     <p:sldId xmlns:r="http://schemas.openxmlformats.org/officeDocument/2006/relationships" id="291" r:id="R1ab90c56a6ad42a1"/>
     <p:sldId xmlns:r="http://schemas.openxmlformats.org/officeDocument/2006/relationships" id="292" r:id="R688806edbe784159"/>
     <p:sldId xmlns:r="http://schemas.openxmlformats.org/officeDocument/2006/relationships" id="293" r:id="Raa255a47d90849ab"/>
+    <p:sldId id="321" r:id="rId22"/>
+    <p:sldId id="322" r:id="rId23"/>
     <p:sldId xmlns:r="http://schemas.openxmlformats.org/officeDocument/2006/relationships" id="294" r:id="R93ea280d32334cfc"/>
     <p:sldId xmlns:r="http://schemas.openxmlformats.org/officeDocument/2006/relationships" id="295" r:id="R1f6e945344b94749"/>
     <p:sldId xmlns:r="http://schemas.openxmlformats.org/officeDocument/2006/relationships" id="296" r:id="R286bcb1df70645a8"/>
     <p:sldId xmlns:r="http://schemas.openxmlformats.org/officeDocument/2006/relationships" id="297" r:id="Rc07c7b647da44fb0"/>
     <p:sldId xmlns:r="http://schemas.openxmlformats.org/officeDocument/2006/relationships" id="298" r:id="Rfe0be296f2c345f1"/>
     <p:sldId xmlns:r="http://schemas.openxmlformats.org/officeDocument/2006/relationships" id="299" r:id="Rb8958d0a8c814a88"/>
-    <p:sldId id="300" r:id="rId1"/>
-    <p:sldId id="301" r:id="rId2"/>
-    <p:sldId id="302" r:id="rId3"/>
-    <p:sldId id="303" r:id="rId4"/>
-    <p:sldId id="304" r:id="rId5"/>
-    <p:sldId id="305" r:id="rId6"/>
-    <p:sldId id="306" r:id="rId7"/>
-    <p:sldId id="307" r:id="rId8"/>
-    <p:sldId id="308" r:id="rId9"/>
-    <p:sldId id="309" r:id="rId10"/>
-    <p:sldId id="310" r:id="rId11"/>
-    <p:sldId id="311" r:id="rId12"/>
-    <p:sldId id="312" r:id="rId13"/>
-    <p:sldId id="313" r:id="rId14"/>
-    <p:sldId id="314" r:id="rId15"/>
-    <p:sldId id="315" r:id="rId16"/>
-    <p:sldId id="316" r:id="rId17"/>
-    <p:sldId id="317" r:id="rId18"/>
-    <p:sldId id="318" r:id="rId19"/>
-    <p:sldId id="319" r:id="rId20"/>
-    <p:sldId id="320" r:id="rId21"/>
-    <p:sldId id="321" r:id="rId22"/>
-    <p:sldId id="322" r:id="rId23"/>
   </p:sldIdLst>
   <p:sldSz cx="12192000" cy="6858000"/>
   <p:notesSz cx="6858000" cy="9144000"/>
@@ -42840,7 +42840,7 @@
 
 <file path=ppt/slides/slide45.xml><?xml version="1.0" encoding="utf-8"?>
 <p:sld xmlns:a="http://schemas.openxmlformats.org/drawingml/2006/main" xmlns:r="http://schemas.openxmlformats.org/officeDocument/2006/relationships" xmlns:p="http://schemas.openxmlformats.org/presentationml/2006/main">
-  <p:cSld name="程式碼附錄 1: env 層級範例 (1/2)">
+  <p:cSld name="範例程式碼：env 層級範例 (1/2)">
     <p:bg>
       <p:bgPr>
         <a:solidFill>
@@ -42897,7 +42897,7 @@
                 <a:ea typeface="Aptos"/>
                 <a:cs typeface="Aptos"/>
               </a:rPr>
-              <a:t>CODE APPENDIX</a:t>
+              <a:t>CODE EXAMPLE</a:t>
             </a:r>
           </a:p>
         </p:txBody>
@@ -42936,7 +42936,7 @@
                 <a:ea typeface="Aptos"/>
                 <a:cs typeface="Aptos"/>
               </a:rPr>
-              <a:t>程式碼附錄 1: env 層級範例 (1/2)</a:t>
+              <a:t>範例程式碼：env 層級範例 (1/2)</a:t>
             </a:r>
           </a:p>
         </p:txBody>
@@ -43369,7 +43369,7 @@
                 <a:ea typeface="Aptos"/>
                 <a:cs typeface="Aptos"/>
               </a:rPr>
-              <a:t>Docker 基礎教學 | 第 6 堂 | Code 1/23</a:t>
+              <a:t>Docker 基礎教學 | 第 6 堂 | 範例程式碼</a:t>
             </a:r>
           </a:p>
         </p:txBody>
@@ -43408,7 +43408,7 @@
                 <a:ea typeface="Aptos"/>
                 <a:cs typeface="Aptos"/>
               </a:rPr>
-              <a:t>A1</a:t>
+              <a:t>CODE</a:t>
             </a:r>
           </a:p>
         </p:txBody>
@@ -43423,7 +43423,7 @@
 
 <file path=ppt/slides/slide46.xml><?xml version="1.0" encoding="utf-8"?>
 <p:sld xmlns:a="http://schemas.openxmlformats.org/drawingml/2006/main" xmlns:r="http://schemas.openxmlformats.org/officeDocument/2006/relationships" xmlns:p="http://schemas.openxmlformats.org/presentationml/2006/main">
-  <p:cSld name="程式碼附錄 2: env 層級範例 (2/2)">
+  <p:cSld name="範例程式碼：env 層級範例 (2/2)">
     <p:bg>
       <p:bgPr>
         <a:solidFill>
@@ -43480,7 +43480,7 @@
                 <a:ea typeface="Aptos"/>
                 <a:cs typeface="Aptos"/>
               </a:rPr>
-              <a:t>CODE APPENDIX</a:t>
+              <a:t>CODE EXAMPLE</a:t>
             </a:r>
           </a:p>
         </p:txBody>
@@ -43519,7 +43519,7 @@
                 <a:ea typeface="Aptos"/>
                 <a:cs typeface="Aptos"/>
               </a:rPr>
-              <a:t>程式碼附錄 2: env 層級範例 (2/2)</a:t>
+              <a:t>範例程式碼：env 層級範例 (2/2)</a:t>
             </a:r>
           </a:p>
         </p:txBody>
@@ -43679,7 +43679,7 @@
                 <a:ea typeface="Aptos"/>
                 <a:cs typeface="Aptos"/>
               </a:rPr>
-              <a:t>Docker 基礎教學 | 第 6 堂 | Code 2/23</a:t>
+              <a:t>Docker 基礎教學 | 第 6 堂 | 範例程式碼</a:t>
             </a:r>
           </a:p>
         </p:txBody>
@@ -43718,7 +43718,7 @@
                 <a:ea typeface="Aptos"/>
                 <a:cs typeface="Aptos"/>
               </a:rPr>
-              <a:t>A2</a:t>
+              <a:t>CODE</a:t>
             </a:r>
           </a:p>
         </p:txBody>
@@ -43733,7 +43733,7 @@
 
 <file path=ppt/slides/slide47.xml><?xml version="1.0" encoding="utf-8"?>
 <p:sld xmlns:a="http://schemas.openxmlformats.org/drawingml/2006/main" xmlns:r="http://schemas.openxmlformats.org/officeDocument/2006/relationships" xmlns:p="http://schemas.openxmlformats.org/presentationml/2006/main">
-  <p:cSld name="程式碼附錄 3: Secrets 登入 Docker Hub">
+  <p:cSld name="範例程式碼：Secrets 登入 Docker Hub">
     <p:bg>
       <p:bgPr>
         <a:solidFill>
@@ -43790,7 +43790,7 @@
                 <a:ea typeface="Aptos"/>
                 <a:cs typeface="Aptos"/>
               </a:rPr>
-              <a:t>CODE APPENDIX</a:t>
+              <a:t>CODE EXAMPLE</a:t>
             </a:r>
           </a:p>
         </p:txBody>
@@ -43829,7 +43829,7 @@
                 <a:ea typeface="Aptos"/>
                 <a:cs typeface="Aptos"/>
               </a:rPr>
-              <a:t>程式碼附錄 3: Secrets 登入 Docker Hub</a:t>
+              <a:t>範例程式碼：Secrets 登入 Docker Hub</a:t>
             </a:r>
           </a:p>
         </p:txBody>
@@ -44041,7 +44041,7 @@
                 <a:ea typeface="Aptos"/>
                 <a:cs typeface="Aptos"/>
               </a:rPr>
-              <a:t>Docker 基礎教學 | 第 6 堂 | Code 3/23</a:t>
+              <a:t>Docker 基礎教學 | 第 6 堂 | 範例程式碼</a:t>
             </a:r>
           </a:p>
         </p:txBody>
@@ -44080,7 +44080,7 @@
                 <a:ea typeface="Aptos"/>
                 <a:cs typeface="Aptos"/>
               </a:rPr>
-              <a:t>A3</a:t>
+              <a:t>CODE</a:t>
             </a:r>
           </a:p>
         </p:txBody>
@@ -44095,7 +44095,7 @@
 
 <file path=ppt/slides/slide48.xml><?xml version="1.0" encoding="utf-8"?>
 <p:sld xmlns:a="http://schemas.openxmlformats.org/drawingml/2006/main" xmlns:r="http://schemas.openxmlformats.org/officeDocument/2006/relationships" xmlns:p="http://schemas.openxmlformats.org/presentationml/2006/main">
-  <p:cSld name="程式碼附錄 4: Flask app.py (1/2)">
+  <p:cSld name="範例程式碼：Flask app.py (1/2)">
     <p:bg>
       <p:bgPr>
         <a:solidFill>
@@ -44152,7 +44152,7 @@
                 <a:ea typeface="Aptos"/>
                 <a:cs typeface="Aptos"/>
               </a:rPr>
-              <a:t>CODE APPENDIX</a:t>
+              <a:t>CODE EXAMPLE</a:t>
             </a:r>
           </a:p>
         </p:txBody>
@@ -44191,7 +44191,7 @@
                 <a:ea typeface="Aptos"/>
                 <a:cs typeface="Aptos"/>
               </a:rPr>
-              <a:t>程式碼附錄 4: Flask app.py (1/2)</a:t>
+              <a:t>範例程式碼：Flask app.py (1/2)</a:t>
             </a:r>
           </a:p>
         </p:txBody>
@@ -44624,7 +44624,7 @@
                 <a:ea typeface="Aptos"/>
                 <a:cs typeface="Aptos"/>
               </a:rPr>
-              <a:t>Docker 基礎教學 | 第 6 堂 | Code 4/23</a:t>
+              <a:t>Docker 基礎教學 | 第 6 堂 | 範例程式碼</a:t>
             </a:r>
           </a:p>
         </p:txBody>
@@ -44663,7 +44663,7 @@
                 <a:ea typeface="Aptos"/>
                 <a:cs typeface="Aptos"/>
               </a:rPr>
-              <a:t>A4</a:t>
+              <a:t>CODE</a:t>
             </a:r>
           </a:p>
         </p:txBody>
@@ -44678,7 +44678,7 @@
 
 <file path=ppt/slides/slide49.xml><?xml version="1.0" encoding="utf-8"?>
 <p:sld xmlns:a="http://schemas.openxmlformats.org/drawingml/2006/main" xmlns:r="http://schemas.openxmlformats.org/officeDocument/2006/relationships" xmlns:p="http://schemas.openxmlformats.org/presentationml/2006/main">
-  <p:cSld name="程式碼附錄 5: Flask app.py (2/2)">
+  <p:cSld name="範例程式碼：Flask app.py (2/2)">
     <p:bg>
       <p:bgPr>
         <a:solidFill>
@@ -44735,7 +44735,7 @@
                 <a:ea typeface="Aptos"/>
                 <a:cs typeface="Aptos"/>
               </a:rPr>
-              <a:t>CODE APPENDIX</a:t>
+              <a:t>CODE EXAMPLE</a:t>
             </a:r>
           </a:p>
         </p:txBody>
@@ -44774,7 +44774,7 @@
                 <a:ea typeface="Aptos"/>
                 <a:cs typeface="Aptos"/>
               </a:rPr>
-              <a:t>程式碼附錄 5: Flask app.py (2/2)</a:t>
+              <a:t>範例程式碼：Flask app.py (2/2)</a:t>
             </a:r>
           </a:p>
         </p:txBody>
@@ -44999,7 +44999,7 @@
                 <a:ea typeface="Aptos"/>
                 <a:cs typeface="Aptos"/>
               </a:rPr>
-              <a:t>Docker 基礎教學 | 第 6 堂 | Code 5/23</a:t>
+              <a:t>Docker 基礎教學 | 第 6 堂 | 範例程式碼</a:t>
             </a:r>
           </a:p>
         </p:txBody>
@@ -45038,7 +45038,7 @@
                 <a:ea typeface="Aptos"/>
                 <a:cs typeface="Aptos"/>
               </a:rPr>
-              <a:t>A5</a:t>
+              <a:t>CODE</a:t>
             </a:r>
           </a:p>
         </p:txBody>
@@ -45999,7 +45999,7 @@
 
 <file path=ppt/slides/slide50.xml><?xml version="1.0" encoding="utf-8"?>
 <p:sld xmlns:a="http://schemas.openxmlformats.org/drawingml/2006/main" xmlns:r="http://schemas.openxmlformats.org/officeDocument/2006/relationships" xmlns:p="http://schemas.openxmlformats.org/presentationml/2006/main">
-  <p:cSld name="程式碼附錄 6: test_app.py (1/2)">
+  <p:cSld name="範例程式碼：test_app.py (1/2)">
     <p:bg>
       <p:bgPr>
         <a:solidFill>
@@ -46056,7 +46056,7 @@
                 <a:ea typeface="Aptos"/>
                 <a:cs typeface="Aptos"/>
               </a:rPr>
-              <a:t>CODE APPENDIX</a:t>
+              <a:t>CODE EXAMPLE</a:t>
             </a:r>
           </a:p>
         </p:txBody>
@@ -46095,7 +46095,7 @@
                 <a:ea typeface="Aptos"/>
                 <a:cs typeface="Aptos"/>
               </a:rPr>
-              <a:t>程式碼附錄 6: test_app.py (1/2)</a:t>
+              <a:t>範例程式碼：test_app.py (1/2)</a:t>
             </a:r>
           </a:p>
         </p:txBody>
@@ -46528,7 +46528,7 @@
                 <a:ea typeface="Aptos"/>
                 <a:cs typeface="Aptos"/>
               </a:rPr>
-              <a:t>Docker 基礎教學 | 第 6 堂 | Code 6/23</a:t>
+              <a:t>Docker 基礎教學 | 第 6 堂 | 範例程式碼</a:t>
             </a:r>
           </a:p>
         </p:txBody>
@@ -46567,7 +46567,7 @@
                 <a:ea typeface="Aptos"/>
                 <a:cs typeface="Aptos"/>
               </a:rPr>
-              <a:t>A6</a:t>
+              <a:t>CODE</a:t>
             </a:r>
           </a:p>
         </p:txBody>
@@ -46582,7 +46582,7 @@
 
 <file path=ppt/slides/slide51.xml><?xml version="1.0" encoding="utf-8"?>
 <p:sld xmlns:a="http://schemas.openxmlformats.org/drawingml/2006/main" xmlns:r="http://schemas.openxmlformats.org/officeDocument/2006/relationships" xmlns:p="http://schemas.openxmlformats.org/presentationml/2006/main">
-  <p:cSld name="程式碼附錄 7: test_app.py (2/2)">
+  <p:cSld name="範例程式碼：test_app.py (2/2)">
     <p:bg>
       <p:bgPr>
         <a:solidFill>
@@ -46639,7 +46639,7 @@
                 <a:ea typeface="Aptos"/>
                 <a:cs typeface="Aptos"/>
               </a:rPr>
-              <a:t>CODE APPENDIX</a:t>
+              <a:t>CODE EXAMPLE</a:t>
             </a:r>
           </a:p>
         </p:txBody>
@@ -46678,7 +46678,7 @@
                 <a:ea typeface="Aptos"/>
                 <a:cs typeface="Aptos"/>
               </a:rPr>
-              <a:t>程式碼附錄 7: test_app.py (2/2)</a:t>
+              <a:t>範例程式碼：test_app.py (2/2)</a:t>
             </a:r>
           </a:p>
         </p:txBody>
@@ -46994,7 +46994,7 @@
                 <a:ea typeface="Aptos"/>
                 <a:cs typeface="Aptos"/>
               </a:rPr>
-              <a:t>Docker 基礎教學 | 第 6 堂 | Code 7/23</a:t>
+              <a:t>Docker 基礎教學 | 第 6 堂 | 範例程式碼</a:t>
             </a:r>
           </a:p>
         </p:txBody>
@@ -47033,7 +47033,7 @@
                 <a:ea typeface="Aptos"/>
                 <a:cs typeface="Aptos"/>
               </a:rPr>
-              <a:t>A7</a:t>
+              <a:t>CODE</a:t>
             </a:r>
           </a:p>
         </p:txBody>
@@ -47048,7 +47048,7 @@
 
 <file path=ppt/slides/slide52.xml><?xml version="1.0" encoding="utf-8"?>
 <p:sld xmlns:a="http://schemas.openxmlformats.org/drawingml/2006/main" xmlns:r="http://schemas.openxmlformats.org/officeDocument/2006/relationships" xmlns:p="http://schemas.openxmlformats.org/presentationml/2006/main">
-  <p:cSld name="程式碼附錄 8: requirements.txt / Dockerfile">
+  <p:cSld name="範例程式碼：requirements.txt / Dockerfile">
     <p:bg>
       <p:bgPr>
         <a:solidFill>
@@ -47105,7 +47105,7 @@
                 <a:ea typeface="Aptos"/>
                 <a:cs typeface="Aptos"/>
               </a:rPr>
-              <a:t>CODE APPENDIX</a:t>
+              <a:t>CODE EXAMPLE</a:t>
             </a:r>
           </a:p>
         </p:txBody>
@@ -47144,7 +47144,7 @@
                 <a:ea typeface="Aptos"/>
                 <a:cs typeface="Aptos"/>
               </a:rPr>
-              <a:t>程式碼附錄 8: requirements.txt / Dockerfile</a:t>
+              <a:t>範例程式碼：requirements.txt / Dockerfile</a:t>
             </a:r>
           </a:p>
         </p:txBody>
@@ -47434,7 +47434,7 @@
                 <a:ea typeface="Aptos"/>
                 <a:cs typeface="Aptos"/>
               </a:rPr>
-              <a:t>Docker 基礎教學 | 第 6 堂 | Code 8/23</a:t>
+              <a:t>Docker 基礎教學 | 第 6 堂 | 範例程式碼</a:t>
             </a:r>
           </a:p>
         </p:txBody>
@@ -47473,7 +47473,7 @@
                 <a:ea typeface="Aptos"/>
                 <a:cs typeface="Aptos"/>
               </a:rPr>
-              <a:t>A8</a:t>
+              <a:t>CODE</a:t>
             </a:r>
           </a:p>
         </p:txBody>
@@ -47488,7 +47488,7 @@
 
 <file path=ppt/slides/slide53.xml><?xml version="1.0" encoding="utf-8"?>
 <p:sld xmlns:a="http://schemas.openxmlformats.org/drawingml/2006/main" xmlns:r="http://schemas.openxmlformats.org/officeDocument/2006/relationships" xmlns:p="http://schemas.openxmlformats.org/presentationml/2006/main">
-  <p:cSld name="程式碼附錄 9: .dockerignore">
+  <p:cSld name="範例程式碼：.dockerignore">
     <p:bg>
       <p:bgPr>
         <a:solidFill>
@@ -47545,7 +47545,7 @@
                 <a:ea typeface="Aptos"/>
                 <a:cs typeface="Aptos"/>
               </a:rPr>
-              <a:t>CODE APPENDIX</a:t>
+              <a:t>CODE EXAMPLE</a:t>
             </a:r>
           </a:p>
         </p:txBody>
@@ -47584,7 +47584,7 @@
                 <a:ea typeface="Aptos"/>
                 <a:cs typeface="Aptos"/>
               </a:rPr>
-              <a:t>程式碼附錄 9: .dockerignore</a:t>
+              <a:t>範例程式碼：.dockerignore</a:t>
             </a:r>
           </a:p>
         </p:txBody>
@@ -47835,7 +47835,7 @@
                 <a:ea typeface="Aptos"/>
                 <a:cs typeface="Aptos"/>
               </a:rPr>
-              <a:t>Docker 基礎教學 | 第 6 堂 | Code 9/23</a:t>
+              <a:t>Docker 基礎教學 | 第 6 堂 | 範例程式碼</a:t>
             </a:r>
           </a:p>
         </p:txBody>
@@ -47874,7 +47874,7 @@
                 <a:ea typeface="Aptos"/>
                 <a:cs typeface="Aptos"/>
               </a:rPr>
-              <a:t>A9</a:t>
+              <a:t>CODE</a:t>
             </a:r>
           </a:p>
         </p:txBody>
@@ -47889,7 +47889,7 @@
 
 <file path=ppt/slides/slide54.xml><?xml version="1.0" encoding="utf-8"?>
 <p:sld xmlns:a="http://schemas.openxmlformats.org/drawingml/2006/main" xmlns:r="http://schemas.openxmlformats.org/officeDocument/2006/relationships" xmlns:p="http://schemas.openxmlformats.org/presentationml/2006/main">
-  <p:cSld name="程式碼附錄 10: 本機測試指令">
+  <p:cSld name="範例程式碼：本機測試指令">
     <p:bg>
       <p:bgPr>
         <a:solidFill>
@@ -47946,7 +47946,7 @@
                 <a:ea typeface="Aptos"/>
                 <a:cs typeface="Aptos"/>
               </a:rPr>
-              <a:t>CODE APPENDIX</a:t>
+              <a:t>CODE EXAMPLE</a:t>
             </a:r>
           </a:p>
         </p:txBody>
@@ -47985,7 +47985,7 @@
                 <a:ea typeface="Aptos"/>
                 <a:cs typeface="Aptos"/>
               </a:rPr>
-              <a:t>程式碼附錄 10: 本機測試指令</a:t>
+              <a:t>範例程式碼：本機測試指令</a:t>
             </a:r>
           </a:p>
         </p:txBody>
@@ -48405,7 +48405,7 @@
                 <a:ea typeface="Aptos"/>
                 <a:cs typeface="Aptos"/>
               </a:rPr>
-              <a:t>Docker 基礎教學 | 第 6 堂 | Code 10/23</a:t>
+              <a:t>Docker 基礎教學 | 第 6 堂 | 範例程式碼</a:t>
             </a:r>
           </a:p>
         </p:txBody>
@@ -48444,7 +48444,7 @@
                 <a:ea typeface="Aptos"/>
                 <a:cs typeface="Aptos"/>
               </a:rPr>
-              <a:t>A10</a:t>
+              <a:t>CODE</a:t>
             </a:r>
           </a:p>
         </p:txBody>
@@ -48459,7 +48459,7 @@
 
 <file path=ppt/slides/slide55.xml><?xml version="1.0" encoding="utf-8"?>
 <p:sld xmlns:a="http://schemas.openxmlformats.org/drawingml/2006/main" xmlns:r="http://schemas.openxmlformats.org/officeDocument/2006/relationships" xmlns:p="http://schemas.openxmlformats.org/presentationml/2006/main">
-  <p:cSld name="程式碼附錄 11: 第一版測試 workflow (1/2)">
+  <p:cSld name="範例程式碼：第一版測試 workflow (1/2)">
     <p:bg>
       <p:bgPr>
         <a:solidFill>
@@ -48516,7 +48516,7 @@
                 <a:ea typeface="Aptos"/>
                 <a:cs typeface="Aptos"/>
               </a:rPr>
-              <a:t>CODE APPENDIX</a:t>
+              <a:t>CODE EXAMPLE</a:t>
             </a:r>
           </a:p>
         </p:txBody>
@@ -48555,7 +48555,7 @@
                 <a:ea typeface="Aptos"/>
                 <a:cs typeface="Aptos"/>
               </a:rPr>
-              <a:t>程式碼附錄 11: 第一版測試 workflow (1/2)</a:t>
+              <a:t>範例程式碼：第一版測試 workflow (1/2)</a:t>
             </a:r>
           </a:p>
         </p:txBody>
@@ -48988,7 +48988,7 @@
                 <a:ea typeface="Aptos"/>
                 <a:cs typeface="Aptos"/>
               </a:rPr>
-              <a:t>Docker 基礎教學 | 第 6 堂 | Code 11/23</a:t>
+              <a:t>Docker 基礎教學 | 第 6 堂 | 範例程式碼</a:t>
             </a:r>
           </a:p>
         </p:txBody>
@@ -49027,7 +49027,7 @@
                 <a:ea typeface="Aptos"/>
                 <a:cs typeface="Aptos"/>
               </a:rPr>
-              <a:t>A11</a:t>
+              <a:t>CODE</a:t>
             </a:r>
           </a:p>
         </p:txBody>
@@ -49042,7 +49042,7 @@
 
 <file path=ppt/slides/slide56.xml><?xml version="1.0" encoding="utf-8"?>
 <p:sld xmlns:a="http://schemas.openxmlformats.org/drawingml/2006/main" xmlns:r="http://schemas.openxmlformats.org/officeDocument/2006/relationships" xmlns:p="http://schemas.openxmlformats.org/presentationml/2006/main">
-  <p:cSld name="程式碼附錄 12: 第一版測試 workflow (2/2)">
+  <p:cSld name="範例程式碼：第一版測試 workflow (2/2)">
     <p:bg>
       <p:bgPr>
         <a:solidFill>
@@ -49099,7 +49099,7 @@
                 <a:ea typeface="Aptos"/>
                 <a:cs typeface="Aptos"/>
               </a:rPr>
-              <a:t>CODE APPENDIX</a:t>
+              <a:t>CODE EXAMPLE</a:t>
             </a:r>
           </a:p>
         </p:txBody>
@@ -49138,7 +49138,7 @@
                 <a:ea typeface="Aptos"/>
                 <a:cs typeface="Aptos"/>
               </a:rPr>
-              <a:t>程式碼附錄 12: 第一版測試 workflow (2/2)</a:t>
+              <a:t>範例程式碼：第一版測試 workflow (2/2)</a:t>
             </a:r>
           </a:p>
         </p:txBody>
@@ -49441,7 +49441,7 @@
                 <a:ea typeface="Aptos"/>
                 <a:cs typeface="Aptos"/>
               </a:rPr>
-              <a:t>Docker 基礎教學 | 第 6 堂 | Code 12/23</a:t>
+              <a:t>Docker 基礎教學 | 第 6 堂 | 範例程式碼</a:t>
             </a:r>
           </a:p>
         </p:txBody>
@@ -49480,7 +49480,7 @@
                 <a:ea typeface="Aptos"/>
                 <a:cs typeface="Aptos"/>
               </a:rPr>
-              <a:t>A12</a:t>
+              <a:t>CODE</a:t>
             </a:r>
           </a:p>
         </p:txBody>
@@ -49495,7 +49495,7 @@
 
 <file path=ppt/slides/slide57.xml><?xml version="1.0" encoding="utf-8"?>
 <p:sld xmlns:a="http://schemas.openxmlformats.org/drawingml/2006/main" xmlns:r="http://schemas.openxmlformats.org/officeDocument/2006/relationships" xmlns:p="http://schemas.openxmlformats.org/presentationml/2006/main">
-  <p:cSld name="程式碼附錄 13: 加入 Docker build workflow (1/3)">
+  <p:cSld name="範例程式碼：加入 Docker build workflow (1/3)">
     <p:bg>
       <p:bgPr>
         <a:solidFill>
@@ -49552,7 +49552,7 @@
                 <a:ea typeface="Aptos"/>
                 <a:cs typeface="Aptos"/>
               </a:rPr>
-              <a:t>CODE APPENDIX</a:t>
+              <a:t>CODE EXAMPLE</a:t>
             </a:r>
           </a:p>
         </p:txBody>
@@ -49591,7 +49591,7 @@
                 <a:ea typeface="Aptos"/>
                 <a:cs typeface="Aptos"/>
               </a:rPr>
-              <a:t>程式碼附錄 13: 加入 Docker build workflow (1/3)</a:t>
+              <a:t>範例程式碼：加入 Docker build workflow (1/3)</a:t>
             </a:r>
           </a:p>
         </p:txBody>
@@ -50024,7 +50024,7 @@
                 <a:ea typeface="Aptos"/>
                 <a:cs typeface="Aptos"/>
               </a:rPr>
-              <a:t>Docker 基礎教學 | 第 6 堂 | Code 13/23</a:t>
+              <a:t>Docker 基礎教學 | 第 6 堂 | 範例程式碼</a:t>
             </a:r>
           </a:p>
         </p:txBody>
@@ -50063,7 +50063,7 @@
                 <a:ea typeface="Aptos"/>
                 <a:cs typeface="Aptos"/>
               </a:rPr>
-              <a:t>A13</a:t>
+              <a:t>CODE</a:t>
             </a:r>
           </a:p>
         </p:txBody>
@@ -50078,7 +50078,7 @@
 
 <file path=ppt/slides/slide58.xml><?xml version="1.0" encoding="utf-8"?>
 <p:sld xmlns:a="http://schemas.openxmlformats.org/drawingml/2006/main" xmlns:r="http://schemas.openxmlformats.org/officeDocument/2006/relationships" xmlns:p="http://schemas.openxmlformats.org/presentationml/2006/main">
-  <p:cSld name="程式碼附錄 14: 加入 Docker build workflow (2/3)">
+  <p:cSld name="範例程式碼：加入 Docker build workflow (2/3)">
     <p:bg>
       <p:bgPr>
         <a:solidFill>
@@ -50135,7 +50135,7 @@
                 <a:ea typeface="Aptos"/>
                 <a:cs typeface="Aptos"/>
               </a:rPr>
-              <a:t>CODE APPENDIX</a:t>
+              <a:t>CODE EXAMPLE</a:t>
             </a:r>
           </a:p>
         </p:txBody>
@@ -50174,7 +50174,7 @@
                 <a:ea typeface="Aptos"/>
                 <a:cs typeface="Aptos"/>
               </a:rPr>
-              <a:t>程式碼附錄 14: 加入 Docker build workflow (2/3)</a:t>
+              <a:t>範例程式碼：加入 Docker build workflow (2/3)</a:t>
             </a:r>
           </a:p>
         </p:txBody>
@@ -50607,7 +50607,7 @@
                 <a:ea typeface="Aptos"/>
                 <a:cs typeface="Aptos"/>
               </a:rPr>
-              <a:t>Docker 基礎教學 | 第 6 堂 | Code 14/23</a:t>
+              <a:t>Docker 基礎教學 | 第 6 堂 | 範例程式碼</a:t>
             </a:r>
           </a:p>
         </p:txBody>
@@ -50646,7 +50646,7 @@
                 <a:ea typeface="Aptos"/>
                 <a:cs typeface="Aptos"/>
               </a:rPr>
-              <a:t>A14</a:t>
+              <a:t>CODE</a:t>
             </a:r>
           </a:p>
         </p:txBody>
@@ -50661,7 +50661,7 @@
 
 <file path=ppt/slides/slide59.xml><?xml version="1.0" encoding="utf-8"?>
 <p:sld xmlns:a="http://schemas.openxmlformats.org/drawingml/2006/main" xmlns:r="http://schemas.openxmlformats.org/officeDocument/2006/relationships" xmlns:p="http://schemas.openxmlformats.org/presentationml/2006/main">
-  <p:cSld name="程式碼附錄 15: 加入 Docker build workflow (3/3)">
+  <p:cSld name="範例程式碼：加入 Docker build workflow (3/3)">
     <p:bg>
       <p:bgPr>
         <a:solidFill>
@@ -50718,7 +50718,7 @@
                 <a:ea typeface="Aptos"/>
                 <a:cs typeface="Aptos"/>
               </a:rPr>
-              <a:t>CODE APPENDIX</a:t>
+              <a:t>CODE EXAMPLE</a:t>
             </a:r>
           </a:p>
         </p:txBody>
@@ -50757,7 +50757,7 @@
                 <a:ea typeface="Aptos"/>
                 <a:cs typeface="Aptos"/>
               </a:rPr>
-              <a:t>程式碼附錄 15: 加入 Docker build workflow (3/3)</a:t>
+              <a:t>範例程式碼：加入 Docker build workflow (3/3)</a:t>
             </a:r>
           </a:p>
         </p:txBody>
@@ -50943,7 +50943,7 @@
                 <a:ea typeface="Aptos"/>
                 <a:cs typeface="Aptos"/>
               </a:rPr>
-              <a:t>Docker 基礎教學 | 第 6 堂 | Code 15/23</a:t>
+              <a:t>Docker 基礎教學 | 第 6 堂 | 範例程式碼</a:t>
             </a:r>
           </a:p>
         </p:txBody>
@@ -50982,7 +50982,7 @@
                 <a:ea typeface="Aptos"/>
                 <a:cs typeface="Aptos"/>
               </a:rPr>
-              <a:t>A15</a:t>
+              <a:t>CODE</a:t>
             </a:r>
           </a:p>
         </p:txBody>
@@ -51909,7 +51909,7 @@
 
 <file path=ppt/slides/slide60.xml><?xml version="1.0" encoding="utf-8"?>
 <p:sld xmlns:a="http://schemas.openxmlformats.org/drawingml/2006/main" xmlns:r="http://schemas.openxmlformats.org/officeDocument/2006/relationships" xmlns:p="http://schemas.openxmlformats.org/presentationml/2006/main">
-  <p:cSld name="程式碼附錄 16: CI 健康檢查">
+  <p:cSld name="範例程式碼：CI 健康檢查">
     <p:bg>
       <p:bgPr>
         <a:solidFill>
@@ -51966,7 +51966,7 @@
                 <a:ea typeface="Aptos"/>
                 <a:cs typeface="Aptos"/>
               </a:rPr>
-              <a:t>CODE APPENDIX</a:t>
+              <a:t>CODE EXAMPLE</a:t>
             </a:r>
           </a:p>
         </p:txBody>
@@ -52005,7 +52005,7 @@
                 <a:ea typeface="Aptos"/>
                 <a:cs typeface="Aptos"/>
               </a:rPr>
-              <a:t>程式碼附錄 16: CI 健康檢查</a:t>
+              <a:t>範例程式碼：CI 健康檢查</a:t>
             </a:r>
           </a:p>
         </p:txBody>
@@ -52360,7 +52360,7 @@
                 <a:ea typeface="Aptos"/>
                 <a:cs typeface="Aptos"/>
               </a:rPr>
-              <a:t>Docker 基礎教學 | 第 6 堂 | Code 16/23</a:t>
+              <a:t>Docker 基礎教學 | 第 6 堂 | 範例程式碼</a:t>
             </a:r>
           </a:p>
         </p:txBody>
@@ -52399,7 +52399,7 @@
                 <a:ea typeface="Aptos"/>
                 <a:cs typeface="Aptos"/>
               </a:rPr>
-              <a:t>A16</a:t>
+              <a:t>CODE</a:t>
             </a:r>
           </a:p>
         </p:txBody>
@@ -52414,7 +52414,7 @@
 
 <file path=ppt/slides/slide61.xml><?xml version="1.0" encoding="utf-8"?>
 <p:sld xmlns:a="http://schemas.openxmlformats.org/drawingml/2006/main" xmlns:r="http://schemas.openxmlformats.org/officeDocument/2006/relationships" xmlns:p="http://schemas.openxmlformats.org/presentationml/2006/main">
-  <p:cSld name="程式碼附錄 17: 完整 CI/CD workflow (1/5)">
+  <p:cSld name="範例程式碼：完整 CI/CD workflow (1/5)">
     <p:bg>
       <p:bgPr>
         <a:solidFill>
@@ -52471,7 +52471,7 @@
                 <a:ea typeface="Aptos"/>
                 <a:cs typeface="Aptos"/>
               </a:rPr>
-              <a:t>CODE APPENDIX</a:t>
+              <a:t>CODE EXAMPLE</a:t>
             </a:r>
           </a:p>
         </p:txBody>
@@ -52510,7 +52510,7 @@
                 <a:ea typeface="Aptos"/>
                 <a:cs typeface="Aptos"/>
               </a:rPr>
-              <a:t>程式碼附錄 17: 完整 CI/CD workflow (1/5)</a:t>
+              <a:t>範例程式碼：完整 CI/CD workflow (1/5)</a:t>
             </a:r>
           </a:p>
         </p:txBody>
@@ -52943,7 +52943,7 @@
                 <a:ea typeface="Aptos"/>
                 <a:cs typeface="Aptos"/>
               </a:rPr>
-              <a:t>Docker 基礎教學 | 第 6 堂 | Code 17/23</a:t>
+              <a:t>Docker 基礎教學 | 第 6 堂 | 範例程式碼</a:t>
             </a:r>
           </a:p>
         </p:txBody>
@@ -52982,7 +52982,7 @@
                 <a:ea typeface="Aptos"/>
                 <a:cs typeface="Aptos"/>
               </a:rPr>
-              <a:t>A17</a:t>
+              <a:t>CODE</a:t>
             </a:r>
           </a:p>
         </p:txBody>
@@ -52997,7 +52997,7 @@
 
 <file path=ppt/slides/slide62.xml><?xml version="1.0" encoding="utf-8"?>
 <p:sld xmlns:a="http://schemas.openxmlformats.org/drawingml/2006/main" xmlns:r="http://schemas.openxmlformats.org/officeDocument/2006/relationships" xmlns:p="http://schemas.openxmlformats.org/presentationml/2006/main">
-  <p:cSld name="程式碼附錄 18: 完整 CI/CD workflow (2/5)">
+  <p:cSld name="範例程式碼：完整 CI/CD workflow (2/5)">
     <p:bg>
       <p:bgPr>
         <a:solidFill>
@@ -53054,7 +53054,7 @@
                 <a:ea typeface="Aptos"/>
                 <a:cs typeface="Aptos"/>
               </a:rPr>
-              <a:t>CODE APPENDIX</a:t>
+              <a:t>CODE EXAMPLE</a:t>
             </a:r>
           </a:p>
         </p:txBody>
@@ -53093,7 +53093,7 @@
                 <a:ea typeface="Aptos"/>
                 <a:cs typeface="Aptos"/>
               </a:rPr>
-              <a:t>程式碼附錄 18: 完整 CI/CD workflow (2/5)</a:t>
+              <a:t>範例程式碼：完整 CI/CD workflow (2/5)</a:t>
             </a:r>
           </a:p>
         </p:txBody>
@@ -53526,7 +53526,7 @@
                 <a:ea typeface="Aptos"/>
                 <a:cs typeface="Aptos"/>
               </a:rPr>
-              <a:t>Docker 基礎教學 | 第 6 堂 | Code 18/23</a:t>
+              <a:t>Docker 基礎教學 | 第 6 堂 | 範例程式碼</a:t>
             </a:r>
           </a:p>
         </p:txBody>
@@ -53565,7 +53565,7 @@
                 <a:ea typeface="Aptos"/>
                 <a:cs typeface="Aptos"/>
               </a:rPr>
-              <a:t>A18</a:t>
+              <a:t>CODE</a:t>
             </a:r>
           </a:p>
         </p:txBody>
@@ -53580,7 +53580,7 @@
 
 <file path=ppt/slides/slide63.xml><?xml version="1.0" encoding="utf-8"?>
 <p:sld xmlns:a="http://schemas.openxmlformats.org/drawingml/2006/main" xmlns:r="http://schemas.openxmlformats.org/officeDocument/2006/relationships" xmlns:p="http://schemas.openxmlformats.org/presentationml/2006/main">
-  <p:cSld name="程式碼附錄 19: 完整 CI/CD workflow (3/5)">
+  <p:cSld name="範例程式碼：完整 CI/CD workflow (3/5)">
     <p:bg>
       <p:bgPr>
         <a:solidFill>
@@ -53637,7 +53637,7 @@
                 <a:ea typeface="Aptos"/>
                 <a:cs typeface="Aptos"/>
               </a:rPr>
-              <a:t>CODE APPENDIX</a:t>
+              <a:t>CODE EXAMPLE</a:t>
             </a:r>
           </a:p>
         </p:txBody>
@@ -53676,7 +53676,7 @@
                 <a:ea typeface="Aptos"/>
                 <a:cs typeface="Aptos"/>
               </a:rPr>
-              <a:t>程式碼附錄 19: 完整 CI/CD workflow (3/5)</a:t>
+              <a:t>範例程式碼：完整 CI/CD workflow (3/5)</a:t>
             </a:r>
           </a:p>
         </p:txBody>
@@ -54109,7 +54109,7 @@
                 <a:ea typeface="Aptos"/>
                 <a:cs typeface="Aptos"/>
               </a:rPr>
-              <a:t>Docker 基礎教學 | 第 6 堂 | Code 19/23</a:t>
+              <a:t>Docker 基礎教學 | 第 6 堂 | 範例程式碼</a:t>
             </a:r>
           </a:p>
         </p:txBody>
@@ -54148,7 +54148,7 @@
                 <a:ea typeface="Aptos"/>
                 <a:cs typeface="Aptos"/>
               </a:rPr>
-              <a:t>A19</a:t>
+              <a:t>CODE</a:t>
             </a:r>
           </a:p>
         </p:txBody>
@@ -54163,7 +54163,7 @@
 
 <file path=ppt/slides/slide64.xml><?xml version="1.0" encoding="utf-8"?>
 <p:sld xmlns:a="http://schemas.openxmlformats.org/drawingml/2006/main" xmlns:r="http://schemas.openxmlformats.org/officeDocument/2006/relationships" xmlns:p="http://schemas.openxmlformats.org/presentationml/2006/main">
-  <p:cSld name="程式碼附錄 20: 完整 CI/CD workflow (4/5)">
+  <p:cSld name="範例程式碼：完整 CI/CD workflow (4/5)">
     <p:bg>
       <p:bgPr>
         <a:solidFill>
@@ -54220,7 +54220,7 @@
                 <a:ea typeface="Aptos"/>
                 <a:cs typeface="Aptos"/>
               </a:rPr>
-              <a:t>CODE APPENDIX</a:t>
+              <a:t>CODE EXAMPLE</a:t>
             </a:r>
           </a:p>
         </p:txBody>
@@ -54259,7 +54259,7 @@
                 <a:ea typeface="Aptos"/>
                 <a:cs typeface="Aptos"/>
               </a:rPr>
-              <a:t>程式碼附錄 20: 完整 CI/CD workflow (4/5)</a:t>
+              <a:t>範例程式碼：完整 CI/CD workflow (4/5)</a:t>
             </a:r>
           </a:p>
         </p:txBody>
@@ -54692,7 +54692,7 @@
                 <a:ea typeface="Aptos"/>
                 <a:cs typeface="Aptos"/>
               </a:rPr>
-              <a:t>Docker 基礎教學 | 第 6 堂 | Code 20/23</a:t>
+              <a:t>Docker 基礎教學 | 第 6 堂 | 範例程式碼</a:t>
             </a:r>
           </a:p>
         </p:txBody>
@@ -54731,7 +54731,7 @@
                 <a:ea typeface="Aptos"/>
                 <a:cs typeface="Aptos"/>
               </a:rPr>
-              <a:t>A20</a:t>
+              <a:t>CODE</a:t>
             </a:r>
           </a:p>
         </p:txBody>
@@ -54746,7 +54746,7 @@
 
 <file path=ppt/slides/slide65.xml><?xml version="1.0" encoding="utf-8"?>
 <p:sld xmlns:a="http://schemas.openxmlformats.org/drawingml/2006/main" xmlns:r="http://schemas.openxmlformats.org/officeDocument/2006/relationships" xmlns:p="http://schemas.openxmlformats.org/presentationml/2006/main">
-  <p:cSld name="程式碼附錄 21: 完整 CI/CD workflow (5/5)">
+  <p:cSld name="範例程式碼：完整 CI/CD workflow (5/5)">
     <p:bg>
       <p:bgPr>
         <a:solidFill>
@@ -54803,7 +54803,7 @@
                 <a:ea typeface="Aptos"/>
                 <a:cs typeface="Aptos"/>
               </a:rPr>
-              <a:t>CODE APPENDIX</a:t>
+              <a:t>CODE EXAMPLE</a:t>
             </a:r>
           </a:p>
         </p:txBody>
@@ -54842,7 +54842,7 @@
                 <a:ea typeface="Aptos"/>
                 <a:cs typeface="Aptos"/>
               </a:rPr>
-              <a:t>程式碼附錄 21: 完整 CI/CD workflow (5/5)</a:t>
+              <a:t>範例程式碼：完整 CI/CD workflow (5/5)</a:t>
             </a:r>
           </a:p>
         </p:txBody>
@@ -55249,7 +55249,7 @@
                 <a:ea typeface="Aptos"/>
                 <a:cs typeface="Aptos"/>
               </a:rPr>
-              <a:t>Docker 基礎教學 | 第 6 堂 | Code 21/23</a:t>
+              <a:t>Docker 基礎教學 | 第 6 堂 | 範例程式碼</a:t>
             </a:r>
           </a:p>
         </p:txBody>
@@ -55288,7 +55288,7 @@
                 <a:ea typeface="Aptos"/>
                 <a:cs typeface="Aptos"/>
               </a:rPr>
-              <a:t>A21</a:t>
+              <a:t>CODE</a:t>
             </a:r>
           </a:p>
         </p:txBody>
@@ -55303,7 +55303,7 @@
 
 <file path=ppt/slides/slide66.xml><?xml version="1.0" encoding="utf-8"?>
 <p:sld xmlns:a="http://schemas.openxmlformats.org/drawingml/2006/main" xmlns:r="http://schemas.openxmlformats.org/officeDocument/2006/relationships" xmlns:p="http://schemas.openxmlformats.org/presentationml/2006/main">
-  <p:cSld name="程式碼附錄 22: 手動部署 workflow (1/2)">
+  <p:cSld name="範例程式碼：手動部署 workflow (1/2)">
     <p:bg>
       <p:bgPr>
         <a:solidFill>
@@ -55360,7 +55360,7 @@
                 <a:ea typeface="Aptos"/>
                 <a:cs typeface="Aptos"/>
               </a:rPr>
-              <a:t>CODE APPENDIX</a:t>
+              <a:t>CODE EXAMPLE</a:t>
             </a:r>
           </a:p>
         </p:txBody>
@@ -55399,7 +55399,7 @@
                 <a:ea typeface="Aptos"/>
                 <a:cs typeface="Aptos"/>
               </a:rPr>
-              <a:t>程式碼附錄 22: 手動部署 workflow (1/2)</a:t>
+              <a:t>範例程式碼：手動部署 workflow (1/2)</a:t>
             </a:r>
           </a:p>
         </p:txBody>
@@ -55832,7 +55832,7 @@
                 <a:ea typeface="Aptos"/>
                 <a:cs typeface="Aptos"/>
               </a:rPr>
-              <a:t>Docker 基礎教學 | 第 6 堂 | Code 22/23</a:t>
+              <a:t>Docker 基礎教學 | 第 6 堂 | 範例程式碼</a:t>
             </a:r>
           </a:p>
         </p:txBody>
@@ -55871,7 +55871,7 @@
                 <a:ea typeface="Aptos"/>
                 <a:cs typeface="Aptos"/>
               </a:rPr>
-              <a:t>A22</a:t>
+              <a:t>CODE</a:t>
             </a:r>
           </a:p>
         </p:txBody>
@@ -55886,7 +55886,7 @@
 
 <file path=ppt/slides/slide67.xml><?xml version="1.0" encoding="utf-8"?>
 <p:sld xmlns:a="http://schemas.openxmlformats.org/drawingml/2006/main" xmlns:r="http://schemas.openxmlformats.org/officeDocument/2006/relationships" xmlns:p="http://schemas.openxmlformats.org/presentationml/2006/main">
-  <p:cSld name="程式碼附錄 23: 手動部署 workflow (2/2)">
+  <p:cSld name="範例程式碼：手動部署 workflow (2/2)">
     <p:bg>
       <p:bgPr>
         <a:solidFill>
@@ -55943,7 +55943,7 @@
                 <a:ea typeface="Aptos"/>
                 <a:cs typeface="Aptos"/>
               </a:rPr>
-              <a:t>CODE APPENDIX</a:t>
+              <a:t>CODE EXAMPLE</a:t>
             </a:r>
           </a:p>
         </p:txBody>
@@ -55982,7 +55982,7 @@
                 <a:ea typeface="Aptos"/>
                 <a:cs typeface="Aptos"/>
               </a:rPr>
-              <a:t>程式碼附錄 23: 手動部署 workflow (2/2)</a:t>
+              <a:t>範例程式碼：手動部署 workflow (2/2)</a:t>
             </a:r>
           </a:p>
         </p:txBody>
@@ -56376,7 +56376,7 @@
                 <a:ea typeface="Aptos"/>
                 <a:cs typeface="Aptos"/>
               </a:rPr>
-              <a:t>Docker 基礎教學 | 第 6 堂 | Code 23/23</a:t>
+              <a:t>Docker 基礎教學 | 第 6 堂 | 範例程式碼</a:t>
             </a:r>
           </a:p>
         </p:txBody>
@@ -56415,7 +56415,7 @@
                 <a:ea typeface="Aptos"/>
                 <a:cs typeface="Aptos"/>
               </a:rPr>
-              <a:t>A23</a:t>
+              <a:t>CODE</a:t>
             </a:r>
           </a:p>
         </p:txBody>
